--- a/public/fun/pack/pptx/birthday/돌잔치_01_성장기록중심_외갓집매화.pptx
+++ b/public/fun/pack/pptx/birthday/돌잔치_01_성장기록중심_외갓집매화.pptx
@@ -3347,7 +3347,7 @@
             <a:r>
               <a:rPr sz="4000" b="1" i="0">
                 <a:solidFill>
-                  <a:srgbClr val="742F4C"/>
+                  <a:srgbClr val="6F1F41"/>
                 </a:solidFill>
               </a:rPr>
               <a:t>첫 번째 생일</a:t>
@@ -3385,7 +3385,7 @@
             <a:r>
               <a:rPr sz="1700" b="0" i="1">
                 <a:solidFill>
-                  <a:srgbClr val="742F4C"/>
+                  <a:srgbClr val="6F1F41"/>
                 </a:solidFill>
               </a:rPr>
               <a:t>열두 달 동안 이만큼 자랐습니다</a:t>
@@ -3460,7 +3460,7 @@
     <p:bg>
       <p:bgPr>
         <a:solidFill>
-          <a:srgbClr val="F9F1F4"/>
+          <a:srgbClr val="FCF3F7"/>
         </a:solidFill>
         <a:effectLst/>
       </p:bgPr>
@@ -3487,7 +3487,7 @@
             <a:avLst/>
           </a:prstGeom>
           <a:solidFill>
-            <a:srgbClr val="B8517C"/>
+            <a:srgbClr val="CD4C82"/>
           </a:solidFill>
           <a:ln>
             <a:noFill/>
@@ -3516,7 +3516,7 @@
             <a:avLst/>
           </a:prstGeom>
           <a:solidFill>
-            <a:srgbClr val="3B9142"/>
+            <a:srgbClr val="339941"/>
           </a:solidFill>
           <a:ln>
             <a:noFill/>
@@ -3560,7 +3560,7 @@
             <a:r>
               <a:rPr sz="3000" b="1" i="0">
                 <a:solidFill>
-                  <a:srgbClr val="742F4C"/>
+                  <a:srgbClr val="6F1F41"/>
                 </a:solidFill>
               </a:rPr>
               <a:t>우리 아기를 소개합니다</a:t>
@@ -3585,11 +3585,11 @@
             </a:avLst>
           </a:prstGeom>
           <a:solidFill>
-            <a:srgbClr val="EFD2DE"/>
+            <a:srgbClr val="F7D4E3"/>
           </a:solidFill>
           <a:ln w="19050">
             <a:solidFill>
-              <a:srgbClr val="B8517C"/>
+              <a:srgbClr val="CD4C82"/>
             </a:solidFill>
             <a:prstDash val="dash"/>
           </a:ln>
@@ -3608,7 +3608,7 @@
             <a:r>
               <a:rPr sz="1400" b="0" i="0">
                 <a:solidFill>
-                  <a:srgbClr val="742F4C"/>
+                  <a:srgbClr val="6F1F41"/>
                 </a:solidFill>
               </a:rPr>
               <a:t>아기 사진을 넣어 주세요</a:t>
@@ -3648,7 +3648,7 @@
                       <a:r>
                         <a:rPr sz="1500" b="1">
                           <a:solidFill>
-                            <a:srgbClr val="742F4C"/>
+                            <a:srgbClr val="6F1F41"/>
                           </a:solidFill>
                         </a:rPr>
                         <a:t>이름</a:t>
@@ -3658,30 +3658,30 @@
                   <a:tcPr anchor="ctr" marL="73152" marR="73152">
                     <a:lnL w="9525" cap="flat" cmpd="sng" algn="ctr">
                       <a:solidFill>
-                        <a:srgbClr val="EFD2DE"/>
+                        <a:srgbClr val="F7D4E3"/>
                       </a:solidFill>
                       <a:prstDash val="solid"/>
                     </a:lnL>
                     <a:lnR w="9525" cap="flat" cmpd="sng" algn="ctr">
                       <a:solidFill>
-                        <a:srgbClr val="EFD2DE"/>
+                        <a:srgbClr val="F7D4E3"/>
                       </a:solidFill>
                       <a:prstDash val="solid"/>
                     </a:lnR>
                     <a:lnT w="9525" cap="flat" cmpd="sng" algn="ctr">
                       <a:solidFill>
-                        <a:srgbClr val="EFD2DE"/>
+                        <a:srgbClr val="F7D4E3"/>
                       </a:solidFill>
                       <a:prstDash val="solid"/>
                     </a:lnT>
                     <a:lnB w="9525" cap="flat" cmpd="sng" algn="ctr">
                       <a:solidFill>
-                        <a:srgbClr val="EFD2DE"/>
+                        <a:srgbClr val="F7D4E3"/>
                       </a:solidFill>
                       <a:prstDash val="solid"/>
                     </a:lnB>
                     <a:solidFill>
-                      <a:srgbClr val="EFD2DE"/>
+                      <a:srgbClr val="F7D4E3"/>
                     </a:solidFill>
                   </a:tcPr>
                 </a:tc>
@@ -3704,30 +3704,30 @@
                   <a:tcPr anchor="ctr" marL="73152" marR="73152">
                     <a:lnL w="9525" cap="flat" cmpd="sng" algn="ctr">
                       <a:solidFill>
-                        <a:srgbClr val="EFD2DE"/>
+                        <a:srgbClr val="F7D4E3"/>
                       </a:solidFill>
                       <a:prstDash val="solid"/>
                     </a:lnL>
                     <a:lnR w="9525" cap="flat" cmpd="sng" algn="ctr">
                       <a:solidFill>
-                        <a:srgbClr val="EFD2DE"/>
+                        <a:srgbClr val="F7D4E3"/>
                       </a:solidFill>
                       <a:prstDash val="solid"/>
                     </a:lnR>
                     <a:lnT w="9525" cap="flat" cmpd="sng" algn="ctr">
                       <a:solidFill>
-                        <a:srgbClr val="EFD2DE"/>
+                        <a:srgbClr val="F7D4E3"/>
                       </a:solidFill>
                       <a:prstDash val="solid"/>
                     </a:lnT>
                     <a:lnB w="9525" cap="flat" cmpd="sng" algn="ctr">
                       <a:solidFill>
-                        <a:srgbClr val="EFD2DE"/>
+                        <a:srgbClr val="F7D4E3"/>
                       </a:solidFill>
                       <a:prstDash val="solid"/>
                     </a:lnB>
                     <a:solidFill>
-                      <a:srgbClr val="F9F1F4"/>
+                      <a:srgbClr val="FCF3F7"/>
                     </a:solidFill>
                   </a:tcPr>
                 </a:tc>
@@ -3742,7 +3742,7 @@
                       <a:r>
                         <a:rPr sz="1500" b="1">
                           <a:solidFill>
-                            <a:srgbClr val="742F4C"/>
+                            <a:srgbClr val="6F1F41"/>
                           </a:solidFill>
                         </a:rPr>
                         <a:t>생일</a:t>
@@ -3752,30 +3752,30 @@
                   <a:tcPr anchor="ctr" marL="73152" marR="73152">
                     <a:lnL w="9525" cap="flat" cmpd="sng" algn="ctr">
                       <a:solidFill>
-                        <a:srgbClr val="EFD2DE"/>
+                        <a:srgbClr val="F7D4E3"/>
                       </a:solidFill>
                       <a:prstDash val="solid"/>
                     </a:lnL>
                     <a:lnR w="9525" cap="flat" cmpd="sng" algn="ctr">
                       <a:solidFill>
-                        <a:srgbClr val="EFD2DE"/>
+                        <a:srgbClr val="F7D4E3"/>
                       </a:solidFill>
                       <a:prstDash val="solid"/>
                     </a:lnR>
                     <a:lnT w="9525" cap="flat" cmpd="sng" algn="ctr">
                       <a:solidFill>
-                        <a:srgbClr val="EFD2DE"/>
+                        <a:srgbClr val="F7D4E3"/>
                       </a:solidFill>
                       <a:prstDash val="solid"/>
                     </a:lnT>
                     <a:lnB w="9525" cap="flat" cmpd="sng" algn="ctr">
                       <a:solidFill>
-                        <a:srgbClr val="EFD2DE"/>
+                        <a:srgbClr val="F7D4E3"/>
                       </a:solidFill>
                       <a:prstDash val="solid"/>
                     </a:lnB>
                     <a:solidFill>
-                      <a:srgbClr val="EFD2DE"/>
+                      <a:srgbClr val="F7D4E3"/>
                     </a:solidFill>
                   </a:tcPr>
                 </a:tc>
@@ -3798,25 +3798,25 @@
                   <a:tcPr anchor="ctr" marL="73152" marR="73152">
                     <a:lnL w="9525" cap="flat" cmpd="sng" algn="ctr">
                       <a:solidFill>
-                        <a:srgbClr val="EFD2DE"/>
+                        <a:srgbClr val="F7D4E3"/>
                       </a:solidFill>
                       <a:prstDash val="solid"/>
                     </a:lnL>
                     <a:lnR w="9525" cap="flat" cmpd="sng" algn="ctr">
                       <a:solidFill>
-                        <a:srgbClr val="EFD2DE"/>
+                        <a:srgbClr val="F7D4E3"/>
                       </a:solidFill>
                       <a:prstDash val="solid"/>
                     </a:lnR>
                     <a:lnT w="9525" cap="flat" cmpd="sng" algn="ctr">
                       <a:solidFill>
-                        <a:srgbClr val="EFD2DE"/>
+                        <a:srgbClr val="F7D4E3"/>
                       </a:solidFill>
                       <a:prstDash val="solid"/>
                     </a:lnT>
                     <a:lnB w="9525" cap="flat" cmpd="sng" algn="ctr">
                       <a:solidFill>
-                        <a:srgbClr val="EFD2DE"/>
+                        <a:srgbClr val="F7D4E3"/>
                       </a:solidFill>
                       <a:prstDash val="solid"/>
                     </a:lnB>
@@ -3836,7 +3836,7 @@
                       <a:r>
                         <a:rPr sz="1500" b="1">
                           <a:solidFill>
-                            <a:srgbClr val="742F4C"/>
+                            <a:srgbClr val="6F1F41"/>
                           </a:solidFill>
                         </a:rPr>
                         <a:t>키 · 몸무게</a:t>
@@ -3846,30 +3846,30 @@
                   <a:tcPr anchor="ctr" marL="73152" marR="73152">
                     <a:lnL w="9525" cap="flat" cmpd="sng" algn="ctr">
                       <a:solidFill>
-                        <a:srgbClr val="EFD2DE"/>
+                        <a:srgbClr val="F7D4E3"/>
                       </a:solidFill>
                       <a:prstDash val="solid"/>
                     </a:lnL>
                     <a:lnR w="9525" cap="flat" cmpd="sng" algn="ctr">
                       <a:solidFill>
-                        <a:srgbClr val="EFD2DE"/>
+                        <a:srgbClr val="F7D4E3"/>
                       </a:solidFill>
                       <a:prstDash val="solid"/>
                     </a:lnR>
                     <a:lnT w="9525" cap="flat" cmpd="sng" algn="ctr">
                       <a:solidFill>
-                        <a:srgbClr val="EFD2DE"/>
+                        <a:srgbClr val="F7D4E3"/>
                       </a:solidFill>
                       <a:prstDash val="solid"/>
                     </a:lnT>
                     <a:lnB w="9525" cap="flat" cmpd="sng" algn="ctr">
                       <a:solidFill>
-                        <a:srgbClr val="EFD2DE"/>
+                        <a:srgbClr val="F7D4E3"/>
                       </a:solidFill>
                       <a:prstDash val="solid"/>
                     </a:lnB>
                     <a:solidFill>
-                      <a:srgbClr val="EFD2DE"/>
+                      <a:srgbClr val="F7D4E3"/>
                     </a:solidFill>
                   </a:tcPr>
                 </a:tc>
@@ -3892,30 +3892,30 @@
                   <a:tcPr anchor="ctr" marL="73152" marR="73152">
                     <a:lnL w="9525" cap="flat" cmpd="sng" algn="ctr">
                       <a:solidFill>
-                        <a:srgbClr val="EFD2DE"/>
+                        <a:srgbClr val="F7D4E3"/>
                       </a:solidFill>
                       <a:prstDash val="solid"/>
                     </a:lnL>
                     <a:lnR w="9525" cap="flat" cmpd="sng" algn="ctr">
                       <a:solidFill>
-                        <a:srgbClr val="EFD2DE"/>
+                        <a:srgbClr val="F7D4E3"/>
                       </a:solidFill>
                       <a:prstDash val="solid"/>
                     </a:lnR>
                     <a:lnT w="9525" cap="flat" cmpd="sng" algn="ctr">
                       <a:solidFill>
-                        <a:srgbClr val="EFD2DE"/>
+                        <a:srgbClr val="F7D4E3"/>
                       </a:solidFill>
                       <a:prstDash val="solid"/>
                     </a:lnT>
                     <a:lnB w="9525" cap="flat" cmpd="sng" algn="ctr">
                       <a:solidFill>
-                        <a:srgbClr val="EFD2DE"/>
+                        <a:srgbClr val="F7D4E3"/>
                       </a:solidFill>
                       <a:prstDash val="solid"/>
                     </a:lnB>
                     <a:solidFill>
-                      <a:srgbClr val="F9F1F4"/>
+                      <a:srgbClr val="FCF3F7"/>
                     </a:solidFill>
                   </a:tcPr>
                 </a:tc>
@@ -3930,7 +3930,7 @@
                       <a:r>
                         <a:rPr sz="1500" b="1">
                           <a:solidFill>
-                            <a:srgbClr val="742F4C"/>
+                            <a:srgbClr val="6F1F41"/>
                           </a:solidFill>
                         </a:rPr>
                         <a:t>좋아하는 것</a:t>
@@ -3940,30 +3940,30 @@
                   <a:tcPr anchor="ctr" marL="73152" marR="73152">
                     <a:lnL w="9525" cap="flat" cmpd="sng" algn="ctr">
                       <a:solidFill>
-                        <a:srgbClr val="EFD2DE"/>
+                        <a:srgbClr val="F7D4E3"/>
                       </a:solidFill>
                       <a:prstDash val="solid"/>
                     </a:lnL>
                     <a:lnR w="9525" cap="flat" cmpd="sng" algn="ctr">
                       <a:solidFill>
-                        <a:srgbClr val="EFD2DE"/>
+                        <a:srgbClr val="F7D4E3"/>
                       </a:solidFill>
                       <a:prstDash val="solid"/>
                     </a:lnR>
                     <a:lnT w="9525" cap="flat" cmpd="sng" algn="ctr">
                       <a:solidFill>
-                        <a:srgbClr val="EFD2DE"/>
+                        <a:srgbClr val="F7D4E3"/>
                       </a:solidFill>
                       <a:prstDash val="solid"/>
                     </a:lnT>
                     <a:lnB w="9525" cap="flat" cmpd="sng" algn="ctr">
                       <a:solidFill>
-                        <a:srgbClr val="EFD2DE"/>
+                        <a:srgbClr val="F7D4E3"/>
                       </a:solidFill>
                       <a:prstDash val="solid"/>
                     </a:lnB>
                     <a:solidFill>
-                      <a:srgbClr val="EFD2DE"/>
+                      <a:srgbClr val="F7D4E3"/>
                     </a:solidFill>
                   </a:tcPr>
                 </a:tc>
@@ -3986,25 +3986,25 @@
                   <a:tcPr anchor="ctr" marL="73152" marR="73152">
                     <a:lnL w="9525" cap="flat" cmpd="sng" algn="ctr">
                       <a:solidFill>
-                        <a:srgbClr val="EFD2DE"/>
+                        <a:srgbClr val="F7D4E3"/>
                       </a:solidFill>
                       <a:prstDash val="solid"/>
                     </a:lnL>
                     <a:lnR w="9525" cap="flat" cmpd="sng" algn="ctr">
                       <a:solidFill>
-                        <a:srgbClr val="EFD2DE"/>
+                        <a:srgbClr val="F7D4E3"/>
                       </a:solidFill>
                       <a:prstDash val="solid"/>
                     </a:lnR>
                     <a:lnT w="9525" cap="flat" cmpd="sng" algn="ctr">
                       <a:solidFill>
-                        <a:srgbClr val="EFD2DE"/>
+                        <a:srgbClr val="F7D4E3"/>
                       </a:solidFill>
                       <a:prstDash val="solid"/>
                     </a:lnT>
                     <a:lnB w="9525" cap="flat" cmpd="sng" algn="ctr">
                       <a:solidFill>
-                        <a:srgbClr val="EFD2DE"/>
+                        <a:srgbClr val="F7D4E3"/>
                       </a:solidFill>
                       <a:prstDash val="solid"/>
                     </a:lnB>
@@ -4024,7 +4024,7 @@
                       <a:r>
                         <a:rPr sz="1500" b="1">
                           <a:solidFill>
-                            <a:srgbClr val="742F4C"/>
+                            <a:srgbClr val="6F1F41"/>
                           </a:solidFill>
                         </a:rPr>
                         <a:t>별명</a:t>
@@ -4034,30 +4034,30 @@
                   <a:tcPr anchor="ctr" marL="73152" marR="73152">
                     <a:lnL w="9525" cap="flat" cmpd="sng" algn="ctr">
                       <a:solidFill>
-                        <a:srgbClr val="EFD2DE"/>
+                        <a:srgbClr val="F7D4E3"/>
                       </a:solidFill>
                       <a:prstDash val="solid"/>
                     </a:lnL>
                     <a:lnR w="9525" cap="flat" cmpd="sng" algn="ctr">
                       <a:solidFill>
-                        <a:srgbClr val="EFD2DE"/>
+                        <a:srgbClr val="F7D4E3"/>
                       </a:solidFill>
                       <a:prstDash val="solid"/>
                     </a:lnR>
                     <a:lnT w="9525" cap="flat" cmpd="sng" algn="ctr">
                       <a:solidFill>
-                        <a:srgbClr val="EFD2DE"/>
+                        <a:srgbClr val="F7D4E3"/>
                       </a:solidFill>
                       <a:prstDash val="solid"/>
                     </a:lnT>
                     <a:lnB w="9525" cap="flat" cmpd="sng" algn="ctr">
                       <a:solidFill>
-                        <a:srgbClr val="EFD2DE"/>
+                        <a:srgbClr val="F7D4E3"/>
                       </a:solidFill>
                       <a:prstDash val="solid"/>
                     </a:lnB>
                     <a:solidFill>
-                      <a:srgbClr val="EFD2DE"/>
+                      <a:srgbClr val="F7D4E3"/>
                     </a:solidFill>
                   </a:tcPr>
                 </a:tc>
@@ -4080,30 +4080,30 @@
                   <a:tcPr anchor="ctr" marL="73152" marR="73152">
                     <a:lnL w="9525" cap="flat" cmpd="sng" algn="ctr">
                       <a:solidFill>
-                        <a:srgbClr val="EFD2DE"/>
+                        <a:srgbClr val="F7D4E3"/>
                       </a:solidFill>
                       <a:prstDash val="solid"/>
                     </a:lnL>
                     <a:lnR w="9525" cap="flat" cmpd="sng" algn="ctr">
                       <a:solidFill>
-                        <a:srgbClr val="EFD2DE"/>
+                        <a:srgbClr val="F7D4E3"/>
                       </a:solidFill>
                       <a:prstDash val="solid"/>
                     </a:lnR>
                     <a:lnT w="9525" cap="flat" cmpd="sng" algn="ctr">
                       <a:solidFill>
-                        <a:srgbClr val="EFD2DE"/>
+                        <a:srgbClr val="F7D4E3"/>
                       </a:solidFill>
                       <a:prstDash val="solid"/>
                     </a:lnT>
                     <a:lnB w="9525" cap="flat" cmpd="sng" algn="ctr">
                       <a:solidFill>
-                        <a:srgbClr val="EFD2DE"/>
+                        <a:srgbClr val="F7D4E3"/>
                       </a:solidFill>
                       <a:prstDash val="solid"/>
                     </a:lnB>
                     <a:solidFill>
-                      <a:srgbClr val="F9F1F4"/>
+                      <a:srgbClr val="FCF3F7"/>
                     </a:solidFill>
                   </a:tcPr>
                 </a:tc>
@@ -4118,7 +4118,7 @@
                       <a:r>
                         <a:rPr sz="1500" b="1">
                           <a:solidFill>
-                            <a:srgbClr val="742F4C"/>
+                            <a:srgbClr val="6F1F41"/>
                           </a:solidFill>
                         </a:rPr>
                         <a:t>부모의 마음</a:t>
@@ -4128,30 +4128,30 @@
                   <a:tcPr anchor="ctr" marL="73152" marR="73152">
                     <a:lnL w="9525" cap="flat" cmpd="sng" algn="ctr">
                       <a:solidFill>
-                        <a:srgbClr val="EFD2DE"/>
+                        <a:srgbClr val="F7D4E3"/>
                       </a:solidFill>
                       <a:prstDash val="solid"/>
                     </a:lnL>
                     <a:lnR w="9525" cap="flat" cmpd="sng" algn="ctr">
                       <a:solidFill>
-                        <a:srgbClr val="EFD2DE"/>
+                        <a:srgbClr val="F7D4E3"/>
                       </a:solidFill>
                       <a:prstDash val="solid"/>
                     </a:lnR>
                     <a:lnT w="9525" cap="flat" cmpd="sng" algn="ctr">
                       <a:solidFill>
-                        <a:srgbClr val="EFD2DE"/>
+                        <a:srgbClr val="F7D4E3"/>
                       </a:solidFill>
                       <a:prstDash val="solid"/>
                     </a:lnT>
                     <a:lnB w="9525" cap="flat" cmpd="sng" algn="ctr">
                       <a:solidFill>
-                        <a:srgbClr val="EFD2DE"/>
+                        <a:srgbClr val="F7D4E3"/>
                       </a:solidFill>
                       <a:prstDash val="solid"/>
                     </a:lnB>
                     <a:solidFill>
-                      <a:srgbClr val="EFD2DE"/>
+                      <a:srgbClr val="F7D4E3"/>
                     </a:solidFill>
                   </a:tcPr>
                 </a:tc>
@@ -4174,25 +4174,25 @@
                   <a:tcPr anchor="ctr" marL="73152" marR="73152">
                     <a:lnL w="9525" cap="flat" cmpd="sng" algn="ctr">
                       <a:solidFill>
-                        <a:srgbClr val="EFD2DE"/>
+                        <a:srgbClr val="F7D4E3"/>
                       </a:solidFill>
                       <a:prstDash val="solid"/>
                     </a:lnL>
                     <a:lnR w="9525" cap="flat" cmpd="sng" algn="ctr">
                       <a:solidFill>
-                        <a:srgbClr val="EFD2DE"/>
+                        <a:srgbClr val="F7D4E3"/>
                       </a:solidFill>
                       <a:prstDash val="solid"/>
                     </a:lnR>
                     <a:lnT w="9525" cap="flat" cmpd="sng" algn="ctr">
                       <a:solidFill>
-                        <a:srgbClr val="EFD2DE"/>
+                        <a:srgbClr val="F7D4E3"/>
                       </a:solidFill>
                       <a:prstDash val="solid"/>
                     </a:lnT>
                     <a:lnB w="9525" cap="flat" cmpd="sng" algn="ctr">
                       <a:solidFill>
-                        <a:srgbClr val="EFD2DE"/>
+                        <a:srgbClr val="F7D4E3"/>
                       </a:solidFill>
                       <a:prstDash val="solid"/>
                     </a:lnB>
@@ -4220,7 +4220,7 @@
     <p:bg>
       <p:bgPr>
         <a:solidFill>
-          <a:srgbClr val="F9F1F4"/>
+          <a:srgbClr val="FCF3F7"/>
         </a:solidFill>
         <a:effectLst/>
       </p:bgPr>
@@ -4247,7 +4247,7 @@
             <a:avLst/>
           </a:prstGeom>
           <a:solidFill>
-            <a:srgbClr val="B8517C"/>
+            <a:srgbClr val="CD4C82"/>
           </a:solidFill>
           <a:ln>
             <a:noFill/>
@@ -4276,7 +4276,7 @@
             <a:avLst/>
           </a:prstGeom>
           <a:solidFill>
-            <a:srgbClr val="3B9142"/>
+            <a:srgbClr val="339941"/>
           </a:solidFill>
           <a:ln>
             <a:noFill/>
@@ -4320,7 +4320,7 @@
             <a:r>
               <a:rPr sz="3000" b="1" i="0">
                 <a:solidFill>
-                  <a:srgbClr val="742F4C"/>
+                  <a:srgbClr val="6F1F41"/>
                 </a:solidFill>
               </a:rPr>
               <a:t>한 해 성장 기록</a:t>
@@ -4343,7 +4343,7 @@
             <a:avLst/>
           </a:prstGeom>
           <a:solidFill>
-            <a:srgbClr val="EFD2DE"/>
+            <a:srgbClr val="F7D4E3"/>
           </a:solidFill>
           <a:ln>
             <a:noFill/>
@@ -4372,7 +4372,7 @@
             <a:avLst/>
           </a:prstGeom>
           <a:solidFill>
-            <a:srgbClr val="B8517C"/>
+            <a:srgbClr val="CD4C82"/>
           </a:solidFill>
           <a:ln w="38100">
             <a:solidFill>
@@ -4418,7 +4418,7 @@
             <a:r>
               <a:rPr sz="1400" b="1" i="0">
                 <a:solidFill>
-                  <a:srgbClr val="B8517C"/>
+                  <a:srgbClr val="CD4C82"/>
                 </a:solidFill>
               </a:rPr>
               <a:t>1개월</a:t>
@@ -4456,7 +4456,7 @@
             <a:r>
               <a:rPr sz="1600" b="1" i="0">
                 <a:solidFill>
-                  <a:srgbClr val="742F4C"/>
+                  <a:srgbClr val="6F1F41"/>
                 </a:solidFill>
               </a:rPr>
               <a:t>처음 눈을 맞춘 날</a:t>
@@ -4517,7 +4517,7 @@
             <a:avLst/>
           </a:prstGeom>
           <a:solidFill>
-            <a:srgbClr val="B8517C"/>
+            <a:srgbClr val="CD4C82"/>
           </a:solidFill>
           <a:ln w="38100">
             <a:solidFill>
@@ -4563,7 +4563,7 @@
             <a:r>
               <a:rPr sz="1400" b="1" i="0">
                 <a:solidFill>
-                  <a:srgbClr val="B8517C"/>
+                  <a:srgbClr val="CD4C82"/>
                 </a:solidFill>
               </a:rPr>
               <a:t>3개월</a:t>
@@ -4601,7 +4601,7 @@
             <a:r>
               <a:rPr sz="1600" b="1" i="0">
                 <a:solidFill>
-                  <a:srgbClr val="742F4C"/>
+                  <a:srgbClr val="6F1F41"/>
                 </a:solidFill>
               </a:rPr>
               <a:t>처음 웃은 날</a:t>
@@ -4662,7 +4662,7 @@
             <a:avLst/>
           </a:prstGeom>
           <a:solidFill>
-            <a:srgbClr val="B8517C"/>
+            <a:srgbClr val="CD4C82"/>
           </a:solidFill>
           <a:ln w="38100">
             <a:solidFill>
@@ -4708,7 +4708,7 @@
             <a:r>
               <a:rPr sz="1400" b="1" i="0">
                 <a:solidFill>
-                  <a:srgbClr val="B8517C"/>
+                  <a:srgbClr val="CD4C82"/>
                 </a:solidFill>
               </a:rPr>
               <a:t>6개월</a:t>
@@ -4746,7 +4746,7 @@
             <a:r>
               <a:rPr sz="1600" b="1" i="0">
                 <a:solidFill>
-                  <a:srgbClr val="742F4C"/>
+                  <a:srgbClr val="6F1F41"/>
                 </a:solidFill>
               </a:rPr>
               <a:t>뒤집기 성공</a:t>
@@ -4807,7 +4807,7 @@
             <a:avLst/>
           </a:prstGeom>
           <a:solidFill>
-            <a:srgbClr val="B8517C"/>
+            <a:srgbClr val="CD4C82"/>
           </a:solidFill>
           <a:ln w="38100">
             <a:solidFill>
@@ -4853,7 +4853,7 @@
             <a:r>
               <a:rPr sz="1400" b="1" i="0">
                 <a:solidFill>
-                  <a:srgbClr val="B8517C"/>
+                  <a:srgbClr val="CD4C82"/>
                 </a:solidFill>
               </a:rPr>
               <a:t>9개월</a:t>
@@ -4891,7 +4891,7 @@
             <a:r>
               <a:rPr sz="1600" b="1" i="0">
                 <a:solidFill>
-                  <a:srgbClr val="742F4C"/>
+                  <a:srgbClr val="6F1F41"/>
                 </a:solidFill>
               </a:rPr>
               <a:t>첫 이유식</a:t>
@@ -4952,7 +4952,7 @@
             <a:avLst/>
           </a:prstGeom>
           <a:solidFill>
-            <a:srgbClr val="B8517C"/>
+            <a:srgbClr val="CD4C82"/>
           </a:solidFill>
           <a:ln w="38100">
             <a:solidFill>
@@ -4998,7 +4998,7 @@
             <a:r>
               <a:rPr sz="1400" b="1" i="0">
                 <a:solidFill>
-                  <a:srgbClr val="B8517C"/>
+                  <a:srgbClr val="CD4C82"/>
                 </a:solidFill>
               </a:rPr>
               <a:t>12개월</a:t>
@@ -5036,7 +5036,7 @@
             <a:r>
               <a:rPr sz="1600" b="1" i="0">
                 <a:solidFill>
-                  <a:srgbClr val="742F4C"/>
+                  <a:srgbClr val="6F1F41"/>
                 </a:solidFill>
               </a:rPr>
               <a:t>첫 걸음</a:t>
@@ -5096,7 +5096,7 @@
     <p:bg>
       <p:bgPr>
         <a:solidFill>
-          <a:srgbClr val="F9F1F4"/>
+          <a:srgbClr val="FCF3F7"/>
         </a:solidFill>
         <a:effectLst/>
       </p:bgPr>
@@ -5123,7 +5123,7 @@
             <a:avLst/>
           </a:prstGeom>
           <a:solidFill>
-            <a:srgbClr val="B8517C"/>
+            <a:srgbClr val="CD4C82"/>
           </a:solidFill>
           <a:ln>
             <a:noFill/>
@@ -5152,7 +5152,7 @@
             <a:avLst/>
           </a:prstGeom>
           <a:solidFill>
-            <a:srgbClr val="3B9142"/>
+            <a:srgbClr val="339941"/>
           </a:solidFill>
           <a:ln>
             <a:noFill/>
@@ -5196,7 +5196,7 @@
             <a:r>
               <a:rPr sz="3000" b="1" i="0">
                 <a:solidFill>
-                  <a:srgbClr val="742F4C"/>
+                  <a:srgbClr val="6F1F41"/>
                 </a:solidFill>
               </a:rPr>
               <a:t>키와 몸무게</a:t>
@@ -5249,30 +5249,30 @@
                   <a:tcPr anchor="ctr" marL="73152" marR="73152">
                     <a:lnL w="9525" cap="flat" cmpd="sng" algn="ctr">
                       <a:solidFill>
-                        <a:srgbClr val="B8517C"/>
+                        <a:srgbClr val="CD4C82"/>
                       </a:solidFill>
                       <a:prstDash val="solid"/>
                     </a:lnL>
                     <a:lnR w="9525" cap="flat" cmpd="sng" algn="ctr">
                       <a:solidFill>
-                        <a:srgbClr val="B8517C"/>
+                        <a:srgbClr val="CD4C82"/>
                       </a:solidFill>
                       <a:prstDash val="solid"/>
                     </a:lnR>
                     <a:lnT w="9525" cap="flat" cmpd="sng" algn="ctr">
                       <a:solidFill>
-                        <a:srgbClr val="B8517C"/>
+                        <a:srgbClr val="CD4C82"/>
                       </a:solidFill>
                       <a:prstDash val="solid"/>
                     </a:lnT>
                     <a:lnB w="9525" cap="flat" cmpd="sng" algn="ctr">
                       <a:solidFill>
-                        <a:srgbClr val="B8517C"/>
+                        <a:srgbClr val="CD4C82"/>
                       </a:solidFill>
                       <a:prstDash val="solid"/>
                     </a:lnB>
                     <a:solidFill>
-                      <a:srgbClr val="B8517C"/>
+                      <a:srgbClr val="CD4C82"/>
                     </a:solidFill>
                   </a:tcPr>
                 </a:tc>
@@ -5295,30 +5295,30 @@
                   <a:tcPr anchor="ctr" marL="73152" marR="73152">
                     <a:lnL w="9525" cap="flat" cmpd="sng" algn="ctr">
                       <a:solidFill>
-                        <a:srgbClr val="B8517C"/>
+                        <a:srgbClr val="CD4C82"/>
                       </a:solidFill>
                       <a:prstDash val="solid"/>
                     </a:lnL>
                     <a:lnR w="9525" cap="flat" cmpd="sng" algn="ctr">
                       <a:solidFill>
-                        <a:srgbClr val="B8517C"/>
+                        <a:srgbClr val="CD4C82"/>
                       </a:solidFill>
                       <a:prstDash val="solid"/>
                     </a:lnR>
                     <a:lnT w="9525" cap="flat" cmpd="sng" algn="ctr">
                       <a:solidFill>
-                        <a:srgbClr val="B8517C"/>
+                        <a:srgbClr val="CD4C82"/>
                       </a:solidFill>
                       <a:prstDash val="solid"/>
                     </a:lnT>
                     <a:lnB w="9525" cap="flat" cmpd="sng" algn="ctr">
                       <a:solidFill>
-                        <a:srgbClr val="B8517C"/>
+                        <a:srgbClr val="CD4C82"/>
                       </a:solidFill>
                       <a:prstDash val="solid"/>
                     </a:lnB>
                     <a:solidFill>
-                      <a:srgbClr val="B8517C"/>
+                      <a:srgbClr val="CD4C82"/>
                     </a:solidFill>
                   </a:tcPr>
                 </a:tc>
@@ -5341,30 +5341,30 @@
                   <a:tcPr anchor="ctr" marL="73152" marR="73152">
                     <a:lnL w="9525" cap="flat" cmpd="sng" algn="ctr">
                       <a:solidFill>
-                        <a:srgbClr val="B8517C"/>
+                        <a:srgbClr val="CD4C82"/>
                       </a:solidFill>
                       <a:prstDash val="solid"/>
                     </a:lnL>
                     <a:lnR w="9525" cap="flat" cmpd="sng" algn="ctr">
                       <a:solidFill>
-                        <a:srgbClr val="B8517C"/>
+                        <a:srgbClr val="CD4C82"/>
                       </a:solidFill>
                       <a:prstDash val="solid"/>
                     </a:lnR>
                     <a:lnT w="9525" cap="flat" cmpd="sng" algn="ctr">
                       <a:solidFill>
-                        <a:srgbClr val="B8517C"/>
+                        <a:srgbClr val="CD4C82"/>
                       </a:solidFill>
                       <a:prstDash val="solid"/>
                     </a:lnT>
                     <a:lnB w="9525" cap="flat" cmpd="sng" algn="ctr">
                       <a:solidFill>
-                        <a:srgbClr val="B8517C"/>
+                        <a:srgbClr val="CD4C82"/>
                       </a:solidFill>
                       <a:prstDash val="solid"/>
                     </a:lnB>
                     <a:solidFill>
-                      <a:srgbClr val="B8517C"/>
+                      <a:srgbClr val="CD4C82"/>
                     </a:solidFill>
                   </a:tcPr>
                 </a:tc>
@@ -5387,30 +5387,30 @@
                   <a:tcPr anchor="ctr" marL="73152" marR="73152">
                     <a:lnL w="9525" cap="flat" cmpd="sng" algn="ctr">
                       <a:solidFill>
-                        <a:srgbClr val="B8517C"/>
+                        <a:srgbClr val="CD4C82"/>
                       </a:solidFill>
                       <a:prstDash val="solid"/>
                     </a:lnL>
                     <a:lnR w="9525" cap="flat" cmpd="sng" algn="ctr">
                       <a:solidFill>
-                        <a:srgbClr val="B8517C"/>
+                        <a:srgbClr val="CD4C82"/>
                       </a:solidFill>
                       <a:prstDash val="solid"/>
                     </a:lnR>
                     <a:lnT w="9525" cap="flat" cmpd="sng" algn="ctr">
                       <a:solidFill>
-                        <a:srgbClr val="B8517C"/>
+                        <a:srgbClr val="CD4C82"/>
                       </a:solidFill>
                       <a:prstDash val="solid"/>
                     </a:lnT>
                     <a:lnB w="9525" cap="flat" cmpd="sng" algn="ctr">
                       <a:solidFill>
-                        <a:srgbClr val="B8517C"/>
+                        <a:srgbClr val="CD4C82"/>
                       </a:solidFill>
                       <a:prstDash val="solid"/>
                     </a:lnB>
                     <a:solidFill>
-                      <a:srgbClr val="B8517C"/>
+                      <a:srgbClr val="CD4C82"/>
                     </a:solidFill>
                   </a:tcPr>
                 </a:tc>
@@ -5433,30 +5433,30 @@
                   <a:tcPr anchor="ctr" marL="73152" marR="73152">
                     <a:lnL w="9525" cap="flat" cmpd="sng" algn="ctr">
                       <a:solidFill>
-                        <a:srgbClr val="B8517C"/>
+                        <a:srgbClr val="CD4C82"/>
                       </a:solidFill>
                       <a:prstDash val="solid"/>
                     </a:lnL>
                     <a:lnR w="9525" cap="flat" cmpd="sng" algn="ctr">
                       <a:solidFill>
-                        <a:srgbClr val="B8517C"/>
+                        <a:srgbClr val="CD4C82"/>
                       </a:solidFill>
                       <a:prstDash val="solid"/>
                     </a:lnR>
                     <a:lnT w="9525" cap="flat" cmpd="sng" algn="ctr">
                       <a:solidFill>
-                        <a:srgbClr val="B8517C"/>
+                        <a:srgbClr val="CD4C82"/>
                       </a:solidFill>
                       <a:prstDash val="solid"/>
                     </a:lnT>
                     <a:lnB w="9525" cap="flat" cmpd="sng" algn="ctr">
                       <a:solidFill>
-                        <a:srgbClr val="B8517C"/>
+                        <a:srgbClr val="CD4C82"/>
                       </a:solidFill>
                       <a:prstDash val="solid"/>
                     </a:lnB>
                     <a:solidFill>
-                      <a:srgbClr val="B8517C"/>
+                      <a:srgbClr val="CD4C82"/>
                     </a:solidFill>
                   </a:tcPr>
                 </a:tc>
@@ -5471,7 +5471,7 @@
                       <a:r>
                         <a:rPr sz="1600" b="1">
                           <a:solidFill>
-                            <a:srgbClr val="742F4C"/>
+                            <a:srgbClr val="6F1F41"/>
                           </a:solidFill>
                         </a:rPr>
                         <a:t>키(cm)</a:t>
@@ -5481,30 +5481,30 @@
                   <a:tcPr anchor="ctr" marL="73152" marR="73152">
                     <a:lnL w="9525" cap="flat" cmpd="sng" algn="ctr">
                       <a:solidFill>
-                        <a:srgbClr val="EFD2DE"/>
+                        <a:srgbClr val="F7D4E3"/>
                       </a:solidFill>
                       <a:prstDash val="solid"/>
                     </a:lnL>
                     <a:lnR w="9525" cap="flat" cmpd="sng" algn="ctr">
                       <a:solidFill>
-                        <a:srgbClr val="EFD2DE"/>
+                        <a:srgbClr val="F7D4E3"/>
                       </a:solidFill>
                       <a:prstDash val="solid"/>
                     </a:lnR>
                     <a:lnT w="9525" cap="flat" cmpd="sng" algn="ctr">
                       <a:solidFill>
-                        <a:srgbClr val="EFD2DE"/>
+                        <a:srgbClr val="F7D4E3"/>
                       </a:solidFill>
                       <a:prstDash val="solid"/>
                     </a:lnT>
                     <a:lnB w="9525" cap="flat" cmpd="sng" algn="ctr">
                       <a:solidFill>
-                        <a:srgbClr val="EFD2DE"/>
+                        <a:srgbClr val="F7D4E3"/>
                       </a:solidFill>
                       <a:prstDash val="solid"/>
                     </a:lnB>
                     <a:solidFill>
-                      <a:srgbClr val="EFD2DE"/>
+                      <a:srgbClr val="F7D4E3"/>
                     </a:solidFill>
                   </a:tcPr>
                 </a:tc>
@@ -5527,25 +5527,25 @@
                   <a:tcPr anchor="ctr" marL="73152" marR="73152">
                     <a:lnL w="9525" cap="flat" cmpd="sng" algn="ctr">
                       <a:solidFill>
-                        <a:srgbClr val="EFD2DE"/>
+                        <a:srgbClr val="F7D4E3"/>
                       </a:solidFill>
                       <a:prstDash val="solid"/>
                     </a:lnL>
                     <a:lnR w="9525" cap="flat" cmpd="sng" algn="ctr">
                       <a:solidFill>
-                        <a:srgbClr val="EFD2DE"/>
+                        <a:srgbClr val="F7D4E3"/>
                       </a:solidFill>
                       <a:prstDash val="solid"/>
                     </a:lnR>
                     <a:lnT w="9525" cap="flat" cmpd="sng" algn="ctr">
                       <a:solidFill>
-                        <a:srgbClr val="EFD2DE"/>
+                        <a:srgbClr val="F7D4E3"/>
                       </a:solidFill>
                       <a:prstDash val="solid"/>
                     </a:lnT>
                     <a:lnB w="9525" cap="flat" cmpd="sng" algn="ctr">
                       <a:solidFill>
-                        <a:srgbClr val="EFD2DE"/>
+                        <a:srgbClr val="F7D4E3"/>
                       </a:solidFill>
                       <a:prstDash val="solid"/>
                     </a:lnB>
@@ -5573,25 +5573,25 @@
                   <a:tcPr anchor="ctr" marL="73152" marR="73152">
                     <a:lnL w="9525" cap="flat" cmpd="sng" algn="ctr">
                       <a:solidFill>
-                        <a:srgbClr val="EFD2DE"/>
+                        <a:srgbClr val="F7D4E3"/>
                       </a:solidFill>
                       <a:prstDash val="solid"/>
                     </a:lnL>
                     <a:lnR w="9525" cap="flat" cmpd="sng" algn="ctr">
                       <a:solidFill>
-                        <a:srgbClr val="EFD2DE"/>
+                        <a:srgbClr val="F7D4E3"/>
                       </a:solidFill>
                       <a:prstDash val="solid"/>
                     </a:lnR>
                     <a:lnT w="9525" cap="flat" cmpd="sng" algn="ctr">
                       <a:solidFill>
-                        <a:srgbClr val="EFD2DE"/>
+                        <a:srgbClr val="F7D4E3"/>
                       </a:solidFill>
                       <a:prstDash val="solid"/>
                     </a:lnT>
                     <a:lnB w="9525" cap="flat" cmpd="sng" algn="ctr">
                       <a:solidFill>
-                        <a:srgbClr val="EFD2DE"/>
+                        <a:srgbClr val="F7D4E3"/>
                       </a:solidFill>
                       <a:prstDash val="solid"/>
                     </a:lnB>
@@ -5619,25 +5619,25 @@
                   <a:tcPr anchor="ctr" marL="73152" marR="73152">
                     <a:lnL w="9525" cap="flat" cmpd="sng" algn="ctr">
                       <a:solidFill>
-                        <a:srgbClr val="EFD2DE"/>
+                        <a:srgbClr val="F7D4E3"/>
                       </a:solidFill>
                       <a:prstDash val="solid"/>
                     </a:lnL>
                     <a:lnR w="9525" cap="flat" cmpd="sng" algn="ctr">
                       <a:solidFill>
-                        <a:srgbClr val="EFD2DE"/>
+                        <a:srgbClr val="F7D4E3"/>
                       </a:solidFill>
                       <a:prstDash val="solid"/>
                     </a:lnR>
                     <a:lnT w="9525" cap="flat" cmpd="sng" algn="ctr">
                       <a:solidFill>
-                        <a:srgbClr val="EFD2DE"/>
+                        <a:srgbClr val="F7D4E3"/>
                       </a:solidFill>
                       <a:prstDash val="solid"/>
                     </a:lnT>
                     <a:lnB w="9525" cap="flat" cmpd="sng" algn="ctr">
                       <a:solidFill>
-                        <a:srgbClr val="EFD2DE"/>
+                        <a:srgbClr val="F7D4E3"/>
                       </a:solidFill>
                       <a:prstDash val="solid"/>
                     </a:lnB>
@@ -5665,25 +5665,25 @@
                   <a:tcPr anchor="ctr" marL="73152" marR="73152">
                     <a:lnL w="9525" cap="flat" cmpd="sng" algn="ctr">
                       <a:solidFill>
-                        <a:srgbClr val="EFD2DE"/>
+                        <a:srgbClr val="F7D4E3"/>
                       </a:solidFill>
                       <a:prstDash val="solid"/>
                     </a:lnL>
                     <a:lnR w="9525" cap="flat" cmpd="sng" algn="ctr">
                       <a:solidFill>
-                        <a:srgbClr val="EFD2DE"/>
+                        <a:srgbClr val="F7D4E3"/>
                       </a:solidFill>
                       <a:prstDash val="solid"/>
                     </a:lnR>
                     <a:lnT w="9525" cap="flat" cmpd="sng" algn="ctr">
                       <a:solidFill>
-                        <a:srgbClr val="EFD2DE"/>
+                        <a:srgbClr val="F7D4E3"/>
                       </a:solidFill>
                       <a:prstDash val="solid"/>
                     </a:lnT>
                     <a:lnB w="9525" cap="flat" cmpd="sng" algn="ctr">
                       <a:solidFill>
-                        <a:srgbClr val="EFD2DE"/>
+                        <a:srgbClr val="F7D4E3"/>
                       </a:solidFill>
                       <a:prstDash val="solid"/>
                     </a:lnB>
@@ -5703,7 +5703,7 @@
                       <a:r>
                         <a:rPr sz="1600" b="1">
                           <a:solidFill>
-                            <a:srgbClr val="742F4C"/>
+                            <a:srgbClr val="6F1F41"/>
                           </a:solidFill>
                         </a:rPr>
                         <a:t>몸무게(kg)</a:t>
@@ -5713,30 +5713,30 @@
                   <a:tcPr anchor="ctr" marL="73152" marR="73152">
                     <a:lnL w="9525" cap="flat" cmpd="sng" algn="ctr">
                       <a:solidFill>
-                        <a:srgbClr val="EFD2DE"/>
+                        <a:srgbClr val="F7D4E3"/>
                       </a:solidFill>
                       <a:prstDash val="solid"/>
                     </a:lnL>
                     <a:lnR w="9525" cap="flat" cmpd="sng" algn="ctr">
                       <a:solidFill>
-                        <a:srgbClr val="EFD2DE"/>
+                        <a:srgbClr val="F7D4E3"/>
                       </a:solidFill>
                       <a:prstDash val="solid"/>
                     </a:lnR>
                     <a:lnT w="9525" cap="flat" cmpd="sng" algn="ctr">
                       <a:solidFill>
-                        <a:srgbClr val="EFD2DE"/>
+                        <a:srgbClr val="F7D4E3"/>
                       </a:solidFill>
                       <a:prstDash val="solid"/>
                     </a:lnT>
                     <a:lnB w="9525" cap="flat" cmpd="sng" algn="ctr">
                       <a:solidFill>
-                        <a:srgbClr val="EFD2DE"/>
+                        <a:srgbClr val="F7D4E3"/>
                       </a:solidFill>
                       <a:prstDash val="solid"/>
                     </a:lnB>
                     <a:solidFill>
-                      <a:srgbClr val="EFD2DE"/>
+                      <a:srgbClr val="F7D4E3"/>
                     </a:solidFill>
                   </a:tcPr>
                 </a:tc>
@@ -5759,30 +5759,30 @@
                   <a:tcPr anchor="ctr" marL="73152" marR="73152">
                     <a:lnL w="9525" cap="flat" cmpd="sng" algn="ctr">
                       <a:solidFill>
-                        <a:srgbClr val="EFD2DE"/>
+                        <a:srgbClr val="F7D4E3"/>
                       </a:solidFill>
                       <a:prstDash val="solid"/>
                     </a:lnL>
                     <a:lnR w="9525" cap="flat" cmpd="sng" algn="ctr">
                       <a:solidFill>
-                        <a:srgbClr val="EFD2DE"/>
+                        <a:srgbClr val="F7D4E3"/>
                       </a:solidFill>
                       <a:prstDash val="solid"/>
                     </a:lnR>
                     <a:lnT w="9525" cap="flat" cmpd="sng" algn="ctr">
                       <a:solidFill>
-                        <a:srgbClr val="EFD2DE"/>
+                        <a:srgbClr val="F7D4E3"/>
                       </a:solidFill>
                       <a:prstDash val="solid"/>
                     </a:lnT>
                     <a:lnB w="9525" cap="flat" cmpd="sng" algn="ctr">
                       <a:solidFill>
-                        <a:srgbClr val="EFD2DE"/>
+                        <a:srgbClr val="F7D4E3"/>
                       </a:solidFill>
                       <a:prstDash val="solid"/>
                     </a:lnB>
                     <a:solidFill>
-                      <a:srgbClr val="F9F1F4"/>
+                      <a:srgbClr val="FCF3F7"/>
                     </a:solidFill>
                   </a:tcPr>
                 </a:tc>
@@ -5805,30 +5805,30 @@
                   <a:tcPr anchor="ctr" marL="73152" marR="73152">
                     <a:lnL w="9525" cap="flat" cmpd="sng" algn="ctr">
                       <a:solidFill>
-                        <a:srgbClr val="EFD2DE"/>
+                        <a:srgbClr val="F7D4E3"/>
                       </a:solidFill>
                       <a:prstDash val="solid"/>
                     </a:lnL>
                     <a:lnR w="9525" cap="flat" cmpd="sng" algn="ctr">
                       <a:solidFill>
-                        <a:srgbClr val="EFD2DE"/>
+                        <a:srgbClr val="F7D4E3"/>
                       </a:solidFill>
                       <a:prstDash val="solid"/>
                     </a:lnR>
                     <a:lnT w="9525" cap="flat" cmpd="sng" algn="ctr">
                       <a:solidFill>
-                        <a:srgbClr val="EFD2DE"/>
+                        <a:srgbClr val="F7D4E3"/>
                       </a:solidFill>
                       <a:prstDash val="solid"/>
                     </a:lnT>
                     <a:lnB w="9525" cap="flat" cmpd="sng" algn="ctr">
                       <a:solidFill>
-                        <a:srgbClr val="EFD2DE"/>
+                        <a:srgbClr val="F7D4E3"/>
                       </a:solidFill>
                       <a:prstDash val="solid"/>
                     </a:lnB>
                     <a:solidFill>
-                      <a:srgbClr val="F9F1F4"/>
+                      <a:srgbClr val="FCF3F7"/>
                     </a:solidFill>
                   </a:tcPr>
                 </a:tc>
@@ -5851,30 +5851,30 @@
                   <a:tcPr anchor="ctr" marL="73152" marR="73152">
                     <a:lnL w="9525" cap="flat" cmpd="sng" algn="ctr">
                       <a:solidFill>
-                        <a:srgbClr val="EFD2DE"/>
+                        <a:srgbClr val="F7D4E3"/>
                       </a:solidFill>
                       <a:prstDash val="solid"/>
                     </a:lnL>
                     <a:lnR w="9525" cap="flat" cmpd="sng" algn="ctr">
                       <a:solidFill>
-                        <a:srgbClr val="EFD2DE"/>
+                        <a:srgbClr val="F7D4E3"/>
                       </a:solidFill>
                       <a:prstDash val="solid"/>
                     </a:lnR>
                     <a:lnT w="9525" cap="flat" cmpd="sng" algn="ctr">
                       <a:solidFill>
-                        <a:srgbClr val="EFD2DE"/>
+                        <a:srgbClr val="F7D4E3"/>
                       </a:solidFill>
                       <a:prstDash val="solid"/>
                     </a:lnT>
                     <a:lnB w="9525" cap="flat" cmpd="sng" algn="ctr">
                       <a:solidFill>
-                        <a:srgbClr val="EFD2DE"/>
+                        <a:srgbClr val="F7D4E3"/>
                       </a:solidFill>
                       <a:prstDash val="solid"/>
                     </a:lnB>
                     <a:solidFill>
-                      <a:srgbClr val="F9F1F4"/>
+                      <a:srgbClr val="FCF3F7"/>
                     </a:solidFill>
                   </a:tcPr>
                 </a:tc>
@@ -5897,30 +5897,30 @@
                   <a:tcPr anchor="ctr" marL="73152" marR="73152">
                     <a:lnL w="9525" cap="flat" cmpd="sng" algn="ctr">
                       <a:solidFill>
-                        <a:srgbClr val="EFD2DE"/>
+                        <a:srgbClr val="F7D4E3"/>
                       </a:solidFill>
                       <a:prstDash val="solid"/>
                     </a:lnL>
                     <a:lnR w="9525" cap="flat" cmpd="sng" algn="ctr">
                       <a:solidFill>
-                        <a:srgbClr val="EFD2DE"/>
+                        <a:srgbClr val="F7D4E3"/>
                       </a:solidFill>
                       <a:prstDash val="solid"/>
                     </a:lnR>
                     <a:lnT w="9525" cap="flat" cmpd="sng" algn="ctr">
                       <a:solidFill>
-                        <a:srgbClr val="EFD2DE"/>
+                        <a:srgbClr val="F7D4E3"/>
                       </a:solidFill>
                       <a:prstDash val="solid"/>
                     </a:lnT>
                     <a:lnB w="9525" cap="flat" cmpd="sng" algn="ctr">
                       <a:solidFill>
-                        <a:srgbClr val="EFD2DE"/>
+                        <a:srgbClr val="F7D4E3"/>
                       </a:solidFill>
                       <a:prstDash val="solid"/>
                     </a:lnB>
                     <a:solidFill>
-                      <a:srgbClr val="F9F1F4"/>
+                      <a:srgbClr val="FCF3F7"/>
                     </a:solidFill>
                   </a:tcPr>
                 </a:tc>
@@ -5935,7 +5935,7 @@
                       <a:r>
                         <a:rPr sz="1600" b="1">
                           <a:solidFill>
-                            <a:srgbClr val="742F4C"/>
+                            <a:srgbClr val="6F1F41"/>
                           </a:solidFill>
                         </a:rPr>
                         <a:t>새로 한 것</a:t>
@@ -5945,30 +5945,30 @@
                   <a:tcPr anchor="ctr" marL="73152" marR="73152">
                     <a:lnL w="9525" cap="flat" cmpd="sng" algn="ctr">
                       <a:solidFill>
-                        <a:srgbClr val="EFD2DE"/>
+                        <a:srgbClr val="F7D4E3"/>
                       </a:solidFill>
                       <a:prstDash val="solid"/>
                     </a:lnL>
                     <a:lnR w="9525" cap="flat" cmpd="sng" algn="ctr">
                       <a:solidFill>
-                        <a:srgbClr val="EFD2DE"/>
+                        <a:srgbClr val="F7D4E3"/>
                       </a:solidFill>
                       <a:prstDash val="solid"/>
                     </a:lnR>
                     <a:lnT w="9525" cap="flat" cmpd="sng" algn="ctr">
                       <a:solidFill>
-                        <a:srgbClr val="EFD2DE"/>
+                        <a:srgbClr val="F7D4E3"/>
                       </a:solidFill>
                       <a:prstDash val="solid"/>
                     </a:lnT>
                     <a:lnB w="9525" cap="flat" cmpd="sng" algn="ctr">
                       <a:solidFill>
-                        <a:srgbClr val="EFD2DE"/>
+                        <a:srgbClr val="F7D4E3"/>
                       </a:solidFill>
                       <a:prstDash val="solid"/>
                     </a:lnB>
                     <a:solidFill>
-                      <a:srgbClr val="EFD2DE"/>
+                      <a:srgbClr val="F7D4E3"/>
                     </a:solidFill>
                   </a:tcPr>
                 </a:tc>
@@ -5991,25 +5991,25 @@
                   <a:tcPr anchor="ctr" marL="73152" marR="73152">
                     <a:lnL w="9525" cap="flat" cmpd="sng" algn="ctr">
                       <a:solidFill>
-                        <a:srgbClr val="EFD2DE"/>
+                        <a:srgbClr val="F7D4E3"/>
                       </a:solidFill>
                       <a:prstDash val="solid"/>
                     </a:lnL>
                     <a:lnR w="9525" cap="flat" cmpd="sng" algn="ctr">
                       <a:solidFill>
-                        <a:srgbClr val="EFD2DE"/>
+                        <a:srgbClr val="F7D4E3"/>
                       </a:solidFill>
                       <a:prstDash val="solid"/>
                     </a:lnR>
                     <a:lnT w="9525" cap="flat" cmpd="sng" algn="ctr">
                       <a:solidFill>
-                        <a:srgbClr val="EFD2DE"/>
+                        <a:srgbClr val="F7D4E3"/>
                       </a:solidFill>
                       <a:prstDash val="solid"/>
                     </a:lnT>
                     <a:lnB w="9525" cap="flat" cmpd="sng" algn="ctr">
                       <a:solidFill>
-                        <a:srgbClr val="EFD2DE"/>
+                        <a:srgbClr val="F7D4E3"/>
                       </a:solidFill>
                       <a:prstDash val="solid"/>
                     </a:lnB>
@@ -6037,25 +6037,25 @@
                   <a:tcPr anchor="ctr" marL="73152" marR="73152">
                     <a:lnL w="9525" cap="flat" cmpd="sng" algn="ctr">
                       <a:solidFill>
-                        <a:srgbClr val="EFD2DE"/>
+                        <a:srgbClr val="F7D4E3"/>
                       </a:solidFill>
                       <a:prstDash val="solid"/>
                     </a:lnL>
                     <a:lnR w="9525" cap="flat" cmpd="sng" algn="ctr">
                       <a:solidFill>
-                        <a:srgbClr val="EFD2DE"/>
+                        <a:srgbClr val="F7D4E3"/>
                       </a:solidFill>
                       <a:prstDash val="solid"/>
                     </a:lnR>
                     <a:lnT w="9525" cap="flat" cmpd="sng" algn="ctr">
                       <a:solidFill>
-                        <a:srgbClr val="EFD2DE"/>
+                        <a:srgbClr val="F7D4E3"/>
                       </a:solidFill>
                       <a:prstDash val="solid"/>
                     </a:lnT>
                     <a:lnB w="9525" cap="flat" cmpd="sng" algn="ctr">
                       <a:solidFill>
-                        <a:srgbClr val="EFD2DE"/>
+                        <a:srgbClr val="F7D4E3"/>
                       </a:solidFill>
                       <a:prstDash val="solid"/>
                     </a:lnB>
@@ -6083,25 +6083,25 @@
                   <a:tcPr anchor="ctr" marL="73152" marR="73152">
                     <a:lnL w="9525" cap="flat" cmpd="sng" algn="ctr">
                       <a:solidFill>
-                        <a:srgbClr val="EFD2DE"/>
+                        <a:srgbClr val="F7D4E3"/>
                       </a:solidFill>
                       <a:prstDash val="solid"/>
                     </a:lnL>
                     <a:lnR w="9525" cap="flat" cmpd="sng" algn="ctr">
                       <a:solidFill>
-                        <a:srgbClr val="EFD2DE"/>
+                        <a:srgbClr val="F7D4E3"/>
                       </a:solidFill>
                       <a:prstDash val="solid"/>
                     </a:lnR>
                     <a:lnT w="9525" cap="flat" cmpd="sng" algn="ctr">
                       <a:solidFill>
-                        <a:srgbClr val="EFD2DE"/>
+                        <a:srgbClr val="F7D4E3"/>
                       </a:solidFill>
                       <a:prstDash val="solid"/>
                     </a:lnT>
                     <a:lnB w="9525" cap="flat" cmpd="sng" algn="ctr">
                       <a:solidFill>
-                        <a:srgbClr val="EFD2DE"/>
+                        <a:srgbClr val="F7D4E3"/>
                       </a:solidFill>
                       <a:prstDash val="solid"/>
                     </a:lnB>
@@ -6129,25 +6129,25 @@
                   <a:tcPr anchor="ctr" marL="73152" marR="73152">
                     <a:lnL w="9525" cap="flat" cmpd="sng" algn="ctr">
                       <a:solidFill>
-                        <a:srgbClr val="EFD2DE"/>
+                        <a:srgbClr val="F7D4E3"/>
                       </a:solidFill>
                       <a:prstDash val="solid"/>
                     </a:lnL>
                     <a:lnR w="9525" cap="flat" cmpd="sng" algn="ctr">
                       <a:solidFill>
-                        <a:srgbClr val="EFD2DE"/>
+                        <a:srgbClr val="F7D4E3"/>
                       </a:solidFill>
                       <a:prstDash val="solid"/>
                     </a:lnR>
                     <a:lnT w="9525" cap="flat" cmpd="sng" algn="ctr">
                       <a:solidFill>
-                        <a:srgbClr val="EFD2DE"/>
+                        <a:srgbClr val="F7D4E3"/>
                       </a:solidFill>
                       <a:prstDash val="solid"/>
                     </a:lnT>
                     <a:lnB w="9525" cap="flat" cmpd="sng" algn="ctr">
                       <a:solidFill>
-                        <a:srgbClr val="EFD2DE"/>
+                        <a:srgbClr val="F7D4E3"/>
                       </a:solidFill>
                       <a:prstDash val="solid"/>
                     </a:lnB>
@@ -6175,7 +6175,7 @@
     <p:bg>
       <p:bgPr>
         <a:solidFill>
-          <a:srgbClr val="F9F1F4"/>
+          <a:srgbClr val="FCF3F7"/>
         </a:solidFill>
         <a:effectLst/>
       </p:bgPr>
@@ -6202,7 +6202,7 @@
             <a:avLst/>
           </a:prstGeom>
           <a:solidFill>
-            <a:srgbClr val="B8517C"/>
+            <a:srgbClr val="CD4C82"/>
           </a:solidFill>
           <a:ln>
             <a:noFill/>
@@ -6231,7 +6231,7 @@
             <a:avLst/>
           </a:prstGeom>
           <a:solidFill>
-            <a:srgbClr val="3B9142"/>
+            <a:srgbClr val="339941"/>
           </a:solidFill>
           <a:ln>
             <a:noFill/>
@@ -6275,7 +6275,7 @@
             <a:r>
               <a:rPr sz="3000" b="1" i="0">
                 <a:solidFill>
-                  <a:srgbClr val="742F4C"/>
+                  <a:srgbClr val="6F1F41"/>
                 </a:solidFill>
               </a:rPr>
               <a:t>사진 모음</a:t>
@@ -6300,11 +6300,11 @@
             </a:avLst>
           </a:prstGeom>
           <a:solidFill>
-            <a:srgbClr val="EFD2DE"/>
+            <a:srgbClr val="F7D4E3"/>
           </a:solidFill>
           <a:ln w="19050">
             <a:solidFill>
-              <a:srgbClr val="B8517C"/>
+              <a:srgbClr val="CD4C82"/>
             </a:solidFill>
             <a:prstDash val="dash"/>
           </a:ln>
@@ -6323,7 +6323,7 @@
             <a:r>
               <a:rPr sz="1200" b="0" i="0">
                 <a:solidFill>
-                  <a:srgbClr val="742F4C"/>
+                  <a:srgbClr val="6F1F41"/>
                 </a:solidFill>
               </a:rPr>
               <a:t>사진 1</a:t>
@@ -6348,11 +6348,11 @@
             </a:avLst>
           </a:prstGeom>
           <a:solidFill>
-            <a:srgbClr val="EFD2DE"/>
+            <a:srgbClr val="F7D4E3"/>
           </a:solidFill>
           <a:ln w="19050">
             <a:solidFill>
-              <a:srgbClr val="B8517C"/>
+              <a:srgbClr val="CD4C82"/>
             </a:solidFill>
             <a:prstDash val="dash"/>
           </a:ln>
@@ -6371,7 +6371,7 @@
             <a:r>
               <a:rPr sz="1200" b="0" i="0">
                 <a:solidFill>
-                  <a:srgbClr val="742F4C"/>
+                  <a:srgbClr val="6F1F41"/>
                 </a:solidFill>
               </a:rPr>
               <a:t>사진 2</a:t>
@@ -6396,11 +6396,11 @@
             </a:avLst>
           </a:prstGeom>
           <a:solidFill>
-            <a:srgbClr val="EFD2DE"/>
+            <a:srgbClr val="F7D4E3"/>
           </a:solidFill>
           <a:ln w="19050">
             <a:solidFill>
-              <a:srgbClr val="B8517C"/>
+              <a:srgbClr val="CD4C82"/>
             </a:solidFill>
             <a:prstDash val="dash"/>
           </a:ln>
@@ -6419,7 +6419,7 @@
             <a:r>
               <a:rPr sz="1200" b="0" i="0">
                 <a:solidFill>
-                  <a:srgbClr val="742F4C"/>
+                  <a:srgbClr val="6F1F41"/>
                 </a:solidFill>
               </a:rPr>
               <a:t>사진 3</a:t>
@@ -6444,11 +6444,11 @@
             </a:avLst>
           </a:prstGeom>
           <a:solidFill>
-            <a:srgbClr val="EFD2DE"/>
+            <a:srgbClr val="F7D4E3"/>
           </a:solidFill>
           <a:ln w="19050">
             <a:solidFill>
-              <a:srgbClr val="B8517C"/>
+              <a:srgbClr val="CD4C82"/>
             </a:solidFill>
             <a:prstDash val="dash"/>
           </a:ln>
@@ -6467,7 +6467,7 @@
             <a:r>
               <a:rPr sz="1200" b="0" i="0">
                 <a:solidFill>
-                  <a:srgbClr val="742F4C"/>
+                  <a:srgbClr val="6F1F41"/>
                 </a:solidFill>
               </a:rPr>
               <a:t>사진 4</a:t>
@@ -6492,11 +6492,11 @@
             </a:avLst>
           </a:prstGeom>
           <a:solidFill>
-            <a:srgbClr val="EFD2DE"/>
+            <a:srgbClr val="F7D4E3"/>
           </a:solidFill>
           <a:ln w="19050">
             <a:solidFill>
-              <a:srgbClr val="B8517C"/>
+              <a:srgbClr val="CD4C82"/>
             </a:solidFill>
             <a:prstDash val="dash"/>
           </a:ln>
@@ -6515,7 +6515,7 @@
             <a:r>
               <a:rPr sz="1200" b="0" i="0">
                 <a:solidFill>
-                  <a:srgbClr val="742F4C"/>
+                  <a:srgbClr val="6F1F41"/>
                 </a:solidFill>
               </a:rPr>
               <a:t>사진 5</a:t>
@@ -6540,11 +6540,11 @@
             </a:avLst>
           </a:prstGeom>
           <a:solidFill>
-            <a:srgbClr val="EFD2DE"/>
+            <a:srgbClr val="F7D4E3"/>
           </a:solidFill>
           <a:ln w="19050">
             <a:solidFill>
-              <a:srgbClr val="B8517C"/>
+              <a:srgbClr val="CD4C82"/>
             </a:solidFill>
             <a:prstDash val="dash"/>
           </a:ln>
@@ -6563,7 +6563,7 @@
             <a:r>
               <a:rPr sz="1200" b="0" i="0">
                 <a:solidFill>
-                  <a:srgbClr val="742F4C"/>
+                  <a:srgbClr val="6F1F41"/>
                 </a:solidFill>
               </a:rPr>
               <a:t>사진 6</a:t>
@@ -6588,11 +6588,11 @@
             </a:avLst>
           </a:prstGeom>
           <a:solidFill>
-            <a:srgbClr val="EFD2DE"/>
+            <a:srgbClr val="F7D4E3"/>
           </a:solidFill>
           <a:ln w="19050">
             <a:solidFill>
-              <a:srgbClr val="B8517C"/>
+              <a:srgbClr val="CD4C82"/>
             </a:solidFill>
             <a:prstDash val="dash"/>
           </a:ln>
@@ -6611,7 +6611,7 @@
             <a:r>
               <a:rPr sz="1200" b="0" i="0">
                 <a:solidFill>
-                  <a:srgbClr val="742F4C"/>
+                  <a:srgbClr val="6F1F41"/>
                 </a:solidFill>
               </a:rPr>
               <a:t>사진 7</a:t>
@@ -6636,11 +6636,11 @@
             </a:avLst>
           </a:prstGeom>
           <a:solidFill>
-            <a:srgbClr val="EFD2DE"/>
+            <a:srgbClr val="F7D4E3"/>
           </a:solidFill>
           <a:ln w="19050">
             <a:solidFill>
-              <a:srgbClr val="B8517C"/>
+              <a:srgbClr val="CD4C82"/>
             </a:solidFill>
             <a:prstDash val="dash"/>
           </a:ln>
@@ -6659,7 +6659,7 @@
             <a:r>
               <a:rPr sz="1200" b="0" i="0">
                 <a:solidFill>
-                  <a:srgbClr val="742F4C"/>
+                  <a:srgbClr val="6F1F41"/>
                 </a:solidFill>
               </a:rPr>
               <a:t>사진 8</a:t>
@@ -6739,7 +6739,7 @@
             <a:r>
               <a:rPr sz="3400" b="1" i="0">
                 <a:solidFill>
-                  <a:srgbClr val="742F4C"/>
+                  <a:srgbClr val="6F1F41"/>
                 </a:solidFill>
               </a:rPr>
               <a:t>와 주셔서 고맙습니다</a:t>
@@ -6777,7 +6777,7 @@
             <a:r>
               <a:rPr sz="1700" b="0" i="1">
                 <a:solidFill>
-                  <a:srgbClr val="742F4C"/>
+                  <a:srgbClr val="6F1F41"/>
                 </a:solidFill>
               </a:rPr>
               <a:t>아이가 한 살이 되었습니다</a:t>
@@ -6842,34 +6842,34 @@
         <a:sysClr val="window" lastClr="FFFFFF"/>
       </a:lt1>
       <a:dk2>
-        <a:srgbClr val="742F4C"/>
+        <a:srgbClr val="6F1F41"/>
       </a:dk2>
       <a:lt2>
-        <a:srgbClr val="F9F1F4"/>
+        <a:srgbClr val="FCF3F7"/>
       </a:lt2>
       <a:accent1>
-        <a:srgbClr val="B8517C"/>
+        <a:srgbClr val="CD4C82"/>
       </a:accent1>
       <a:accent2>
-        <a:srgbClr val="3B9142"/>
+        <a:srgbClr val="339941"/>
       </a:accent2>
       <a:accent3>
-        <a:srgbClr val="742F4C"/>
+        <a:srgbClr val="6F1F41"/>
       </a:accent3>
       <a:accent4>
-        <a:srgbClr val="EFD2DE"/>
+        <a:srgbClr val="F7D4E3"/>
       </a:accent4>
       <a:accent5>
-        <a:srgbClr val="7A715F"/>
+        <a:srgbClr val="807262"/>
       </a:accent5>
       <a:accent6>
-        <a:srgbClr val="AC8294"/>
+        <a:srgbClr val="A9798D"/>
       </a:accent6>
       <a:hlink>
-        <a:srgbClr val="B8517C"/>
+        <a:srgbClr val="CD4C82"/>
       </a:hlink>
       <a:folHlink>
-        <a:srgbClr val="742F4C"/>
+        <a:srgbClr val="6F1F41"/>
       </a:folHlink>
     </a:clrScheme>
     <a:fontScheme name="Office">

--- a/public/fun/pack/pptx/birthday/돌잔치_01_성장기록중심_외갓집매화.pptx
+++ b/public/fun/pack/pptx/birthday/돌잔치_01_성장기록중심_외갓집매화.pptx
@@ -3286,6 +3286,14 @@
 <file path=ppt/slides/slide1.xml><?xml version="1.0" encoding="utf-8"?>
 <p:sld xmlns:a="http://schemas.openxmlformats.org/drawingml/2006/main" xmlns:p="http://schemas.openxmlformats.org/presentationml/2006/main" xmlns:r="http://schemas.openxmlformats.org/officeDocument/2006/relationships">
   <p:cSld>
+    <p:bg>
+      <p:bgPr>
+        <a:solidFill>
+          <a:srgbClr val="FDEAF2"/>
+        </a:solidFill>
+        <a:effectLst/>
+      </p:bgPr>
+    </p:bg>
     <p:spTree>
       <p:nvGrpSpPr>
         <p:cNvPr id="1" name=""/>
@@ -3293,30 +3301,119 @@
         <p:nvPr/>
       </p:nvGrpSpPr>
       <p:grpSpPr/>
-      <p:pic>
-        <p:nvPicPr>
-          <p:cNvPr id="3" name="표지 그림" descr="birthday-01.jpg"/>
-          <p:cNvPicPr>
-            <a:picLocks noChangeAspect="1"/>
-          </p:cNvPicPr>
+      <p:sp>
+        <p:nvSpPr>
+          <p:cNvPr id="3" name="사진 자리"/>
+          <p:cNvSpPr/>
           <p:nvPr/>
-        </p:nvPicPr>
-        <p:blipFill>
-          <a:blip r:embed="rId2"/>
-          <a:stretch>
-            <a:fillRect/>
-          </a:stretch>
-        </p:blipFill>
-        <p:spPr>
-          <a:xfrm>
-            <a:off x="0" y="0"/>
-            <a:ext cx="12191695" cy="6858000"/>
+        </p:nvSpPr>
+        <p:spPr>
+          <a:xfrm>
+            <a:off x="7558851" y="685800"/>
+            <a:ext cx="3169840" cy="5486400"/>
+          </a:xfrm>
+          <a:prstGeom prst="round2SameRect">
+            <a:avLst>
+              <a:gd name="adj1" fmla="val 50000"/>
+              <a:gd name="adj2" fmla="val 0"/>
+            </a:avLst>
+          </a:prstGeom>
+          <a:solidFill>
+            <a:srgbClr val="F2A6C6"/>
+          </a:solidFill>
+          <a:ln>
+            <a:noFill/>
+          </a:ln>
+        </p:spPr>
+        <p:txBody>
+          <a:bodyPr rtlCol="0" anchor="ctr" wrap="square" lIns="54864" rIns="54864" tIns="27432" bIns="27432">
+            <a:noAutofit/>
+          </a:bodyPr>
+          <a:lstStyle/>
+          <a:p>
+            <a:pPr algn="ctr">
+              <a:lnSpc>
+                <a:spcPct val="100000"/>
+              </a:lnSpc>
+            </a:pPr>
+            <a:r>
+              <a:rPr sz="1400" b="0" i="0">
+                <a:solidFill>
+                  <a:srgbClr val="492735"/>
+                </a:solidFill>
+              </a:rPr>
+              <a:t>사진을 넣어 주세요</a:t>
+            </a:r>
+          </a:p>
+        </p:txBody>
+      </p:sp>
+      <p:sp>
+        <p:nvSpPr>
+          <p:cNvPr id="4" name="장식"/>
+          <p:cNvSpPr/>
+          <p:nvPr/>
+        </p:nvSpPr>
+        <p:spPr>
+          <a:xfrm>
+            <a:off x="6827349" y="4251960"/>
+            <a:ext cx="1005840" cy="1005840"/>
+          </a:xfrm>
+          <a:prstGeom prst="ellipse">
+            <a:avLst/>
+          </a:prstGeom>
+          <a:solidFill>
+            <a:srgbClr val="F2A6C6"/>
+          </a:solidFill>
+          <a:ln>
+            <a:noFill/>
+          </a:ln>
+        </p:spPr>
+        <p:txBody>
+          <a:bodyPr rtlCol="0" anchor="ctr"/>
+          <a:lstStyle/>
+          <a:p>
+            <a:pPr algn="ctr"/>
+          </a:p>
+        </p:txBody>
+      </p:sp>
+      <p:sp>
+        <p:nvSpPr>
+          <p:cNvPr id="5" name="라벨"/>
+          <p:cNvSpPr txBox="1"/>
+          <p:nvPr/>
+        </p:nvSpPr>
+        <p:spPr>
+          <a:xfrm>
+            <a:off x="822960" y="2148840"/>
+            <a:ext cx="5608179" cy="274320"/>
           </a:xfrm>
           <a:prstGeom prst="rect">
             <a:avLst/>
           </a:prstGeom>
-        </p:spPr>
-      </p:pic>
+          <a:noFill/>
+        </p:spPr>
+        <p:txBody>
+          <a:bodyPr wrap="square" lIns="54864" rIns="54864" tIns="27432" bIns="27432" anchor="t">
+            <a:noAutofit/>
+          </a:bodyPr>
+          <a:lstStyle/>
+          <a:p>
+            <a:pPr algn="l">
+              <a:lnSpc>
+                <a:spcPct val="115000"/>
+              </a:lnSpc>
+            </a:pPr>
+            <a:r>
+              <a:rPr sz="1000" b="1" i="0" spc="250">
+                <a:solidFill>
+                  <a:srgbClr val="26231F"/>
+                </a:solidFill>
+              </a:rPr>
+              <a:t>FIRST BIRTHDAY</a:t>
+            </a:r>
+          </a:p>
+        </p:txBody>
+      </p:sp>
       <p:sp>
         <p:nvSpPr>
           <p:cNvPr id="2" name="Title 1"/>
@@ -3329,8 +3426,8 @@
         </p:nvSpPr>
         <p:spPr>
           <a:xfrm>
-            <a:off x="853418" y="2057400"/>
-            <a:ext cx="6095847" cy="1554480"/>
+            <a:off x="822960" y="2606040"/>
+            <a:ext cx="5608179" cy="1188720"/>
           </a:xfrm>
         </p:spPr>
         <p:txBody>
@@ -3347,7 +3444,7 @@
             <a:r>
               <a:rPr sz="4000" b="1" i="0">
                 <a:solidFill>
-                  <a:srgbClr val="6F1F41"/>
+                  <a:srgbClr val="26231F"/>
                 </a:solidFill>
               </a:rPr>
               <a:t>첫 번째 생일</a:t>
@@ -3357,14 +3454,14 @@
       </p:sp>
       <p:sp>
         <p:nvSpPr>
-          <p:cNvPr id="4" name="한 줄 문구"/>
+          <p:cNvPr id="6" name="한 줄 문구"/>
           <p:cNvSpPr txBox="1"/>
           <p:nvPr/>
         </p:nvSpPr>
         <p:spPr>
           <a:xfrm>
-            <a:off x="853418" y="3749039"/>
-            <a:ext cx="6095847" cy="822960"/>
+            <a:off x="822960" y="3886200"/>
+            <a:ext cx="5608179" cy="822960"/>
           </a:xfrm>
           <a:prstGeom prst="rect">
             <a:avLst/>
@@ -3383,26 +3480,26 @@
               </a:lnSpc>
             </a:pPr>
             <a:r>
-              <a:rPr sz="1700" b="0" i="1">
+              <a:rPr sz="1700" b="0" i="0">
                 <a:solidFill>
-                  <a:srgbClr val="6F1F41"/>
+                  <a:srgbClr val="26231F"/>
                 </a:solidFill>
               </a:rPr>
-              <a:t>열두 달 동안 이만큼 자랐습니다</a:t>
-            </a:r>
-          </a:p>
-        </p:txBody>
-      </p:sp>
-      <p:sp>
-        <p:nvSpPr>
-          <p:cNvPr id="5" name="안내 문구"/>
+              <a:t>지금까지 이만큼 자랐습니다</a:t>
+            </a:r>
+          </a:p>
+        </p:txBody>
+      </p:sp>
+      <p:sp>
+        <p:nvSpPr>
+          <p:cNvPr id="7" name="안내 문구"/>
           <p:cNvSpPr txBox="1"/>
           <p:nvPr/>
         </p:nvSpPr>
         <p:spPr>
           <a:xfrm>
-            <a:off x="853418" y="4617720"/>
-            <a:ext cx="6095847" cy="914400"/>
+            <a:off x="822960" y="4754880"/>
+            <a:ext cx="5608179" cy="914400"/>
           </a:xfrm>
           <a:prstGeom prst="rect">
             <a:avLst/>
@@ -3423,10 +3520,10 @@
             <a:r>
               <a:rPr sz="1400" b="0" i="0">
                 <a:solidFill>
-                  <a:srgbClr val="666666"/>
+                  <a:srgbClr val="26231F"/>
                 </a:solidFill>
               </a:rPr>
-              <a:t>아기 이름 · 2027. 00. 00</a:t>
+              <a:t>아기 이름 · 날짜 입력</a:t>
             </a:r>
           </a:p>
           <a:p>
@@ -3438,7 +3535,7 @@
             <a:r>
               <a:rPr sz="1400" b="0" i="0">
                 <a:solidFill>
-                  <a:srgbClr val="666666"/>
+                  <a:srgbClr val="26231F"/>
                 </a:solidFill>
               </a:rPr>
               <a:t>장소를 입력하세요</a:t>
@@ -3460,7 +3557,7 @@
     <p:bg>
       <p:bgPr>
         <a:solidFill>
-          <a:srgbClr val="FCF3F7"/>
+          <a:srgbClr val="FDFAFB"/>
         </a:solidFill>
         <a:effectLst/>
       </p:bgPr>
@@ -3480,14 +3577,16 @@
         </p:nvSpPr>
         <p:spPr>
           <a:xfrm>
-            <a:off x="0" y="0"/>
-            <a:ext cx="12191695" cy="274320"/>
-          </a:xfrm>
-          <a:prstGeom prst="rect">
-            <a:avLst/>
+            <a:off x="640080" y="566928"/>
+            <a:ext cx="64008" cy="868680"/>
+          </a:xfrm>
+          <a:prstGeom prst="roundRect">
+            <a:avLst>
+              <a:gd name="adj" fmla="val 50000"/>
+            </a:avLst>
           </a:prstGeom>
           <a:solidFill>
-            <a:srgbClr val="CD4C82"/>
+            <a:srgbClr val="ED97BB"/>
           </a:solidFill>
           <a:ln>
             <a:noFill/>
@@ -3503,20 +3602,58 @@
       </p:sp>
       <p:sp>
         <p:nvSpPr>
-          <p:cNvPr id="4" name="장식"/>
-          <p:cNvSpPr/>
+          <p:cNvPr id="4" name="상단 라벨"/>
+          <p:cNvSpPr txBox="1"/>
           <p:nvPr/>
         </p:nvSpPr>
         <p:spPr>
           <a:xfrm>
-            <a:off x="0" y="274320"/>
-            <a:ext cx="12191695" cy="54864"/>
+            <a:off x="868680" y="274320"/>
+            <a:ext cx="5486400" cy="274320"/>
           </a:xfrm>
           <a:prstGeom prst="rect">
             <a:avLst/>
           </a:prstGeom>
+          <a:noFill/>
+        </p:spPr>
+        <p:txBody>
+          <a:bodyPr wrap="square" lIns="54864" rIns="54864" tIns="27432" bIns="27432" anchor="ctr">
+            <a:noAutofit/>
+          </a:bodyPr>
+          <a:lstStyle/>
+          <a:p>
+            <a:pPr algn="l">
+              <a:lnSpc>
+                <a:spcPct val="115000"/>
+              </a:lnSpc>
+            </a:pPr>
+            <a:r>
+              <a:rPr sz="900" b="1" i="0" spc="250">
+                <a:solidFill>
+                  <a:srgbClr val="8E8780"/>
+                </a:solidFill>
+              </a:rPr>
+              <a:t>FIRST BIRTHDAY</a:t>
+            </a:r>
+          </a:p>
+        </p:txBody>
+      </p:sp>
+      <p:sp>
+        <p:nvSpPr>
+          <p:cNvPr id="5" name="포인트"/>
+          <p:cNvSpPr/>
+          <p:nvPr/>
+        </p:nvSpPr>
+        <p:spPr>
+          <a:xfrm>
+            <a:off x="11167567" y="667512"/>
+            <a:ext cx="310896" cy="310896"/>
+          </a:xfrm>
+          <a:prstGeom prst="mathPlus">
+            <a:avLst/>
+          </a:prstGeom>
           <a:solidFill>
-            <a:srgbClr val="339941"/>
+            <a:srgbClr val="F2A6C6"/>
           </a:solidFill>
           <a:ln>
             <a:noFill/>
@@ -3542,8 +3679,8 @@
         </p:nvSpPr>
         <p:spPr>
           <a:xfrm>
-            <a:off x="640080" y="457200"/>
-            <a:ext cx="9722815" cy="868680"/>
+            <a:off x="868680" y="566928"/>
+            <a:ext cx="9448495" cy="868680"/>
           </a:xfrm>
         </p:spPr>
         <p:txBody>
@@ -3560,7 +3697,7 @@
             <a:r>
               <a:rPr sz="3000" b="1" i="0">
                 <a:solidFill>
-                  <a:srgbClr val="6F1F41"/>
+                  <a:srgbClr val="26231F"/>
                 </a:solidFill>
               </a:rPr>
               <a:t>우리 아기를 소개합니다</a:t>
@@ -3570,14 +3707,14 @@
       </p:sp>
       <p:sp>
         <p:nvSpPr>
-          <p:cNvPr id="5" name="사진 자리"/>
+          <p:cNvPr id="6" name="사진 자리"/>
           <p:cNvSpPr/>
           <p:nvPr/>
         </p:nvSpPr>
         <p:spPr>
           <a:xfrm>
-            <a:off x="640080" y="1600200"/>
-            <a:ext cx="3840480" cy="4617720"/>
+            <a:off x="640080" y="1783080"/>
+            <a:ext cx="3840480" cy="4389120"/>
           </a:xfrm>
           <a:prstGeom prst="roundRect">
             <a:avLst>
@@ -3585,12 +3722,10 @@
             </a:avLst>
           </a:prstGeom>
           <a:solidFill>
-            <a:srgbClr val="F7D4E3"/>
+            <a:srgbClr val="FAD1E2"/>
           </a:solidFill>
           <a:ln w="19050">
-            <a:solidFill>
-              <a:srgbClr val="CD4C82"/>
-            </a:solidFill>
+            <a:noFill/>
             <a:prstDash val="dash"/>
           </a:ln>
         </p:spPr>
@@ -3608,7 +3743,7 @@
             <a:r>
               <a:rPr sz="1400" b="0" i="0">
                 <a:solidFill>
-                  <a:srgbClr val="6F1F41"/>
+                  <a:srgbClr val="8E8780"/>
                 </a:solidFill>
               </a:rPr>
               <a:t>아기 사진을 넣어 주세요</a:t>
@@ -3618,14 +3753,14 @@
       </p:sp>
       <p:graphicFrame>
         <p:nvGraphicFramePr>
-          <p:cNvPr id="6" name="표"/>
+          <p:cNvPr id="7" name="표"/>
           <p:cNvGraphicFramePr>
             <a:graphicFrameLocks noGrp="1"/>
           </p:cNvGraphicFramePr>
           <p:nvPr/>
         </p:nvGraphicFramePr>
         <p:xfrm>
-          <a:off x="4846320" y="1600200"/>
+          <a:off x="4846320" y="1783080"/>
           <a:ext cx="6705295" cy="3950208"/>
         </p:xfrm>
         <a:graphic>
@@ -3648,7 +3783,7 @@
                       <a:r>
                         <a:rPr sz="1500" b="1">
                           <a:solidFill>
-                            <a:srgbClr val="6F1F41"/>
+                            <a:srgbClr val="492735"/>
                           </a:solidFill>
                         </a:rPr>
                         <a:t>이름</a:t>
@@ -3658,30 +3793,30 @@
                   <a:tcPr anchor="ctr" marL="73152" marR="73152">
                     <a:lnL w="9525" cap="flat" cmpd="sng" algn="ctr">
                       <a:solidFill>
-                        <a:srgbClr val="F7D4E3"/>
+                        <a:srgbClr val="FAD1E2"/>
                       </a:solidFill>
                       <a:prstDash val="solid"/>
                     </a:lnL>
                     <a:lnR w="9525" cap="flat" cmpd="sng" algn="ctr">
                       <a:solidFill>
-                        <a:srgbClr val="F7D4E3"/>
+                        <a:srgbClr val="FAD1E2"/>
                       </a:solidFill>
                       <a:prstDash val="solid"/>
                     </a:lnR>
                     <a:lnT w="9525" cap="flat" cmpd="sng" algn="ctr">
                       <a:solidFill>
-                        <a:srgbClr val="F7D4E3"/>
+                        <a:srgbClr val="FAD1E2"/>
                       </a:solidFill>
                       <a:prstDash val="solid"/>
                     </a:lnT>
                     <a:lnB w="9525" cap="flat" cmpd="sng" algn="ctr">
                       <a:solidFill>
-                        <a:srgbClr val="F7D4E3"/>
+                        <a:srgbClr val="FAD1E2"/>
                       </a:solidFill>
                       <a:prstDash val="solid"/>
                     </a:lnB>
                     <a:solidFill>
-                      <a:srgbClr val="F7D4E3"/>
+                      <a:srgbClr val="FAD1E2"/>
                     </a:solidFill>
                   </a:tcPr>
                 </a:tc>
@@ -3694,7 +3829,7 @@
                       <a:r>
                         <a:rPr sz="1500" b="0">
                           <a:solidFill>
-                            <a:srgbClr val="2B2B2B"/>
+                            <a:srgbClr val="26231F"/>
                           </a:solidFill>
                         </a:rPr>
                         <a:t>입력하세요</a:t>
@@ -3704,30 +3839,30 @@
                   <a:tcPr anchor="ctr" marL="73152" marR="73152">
                     <a:lnL w="9525" cap="flat" cmpd="sng" algn="ctr">
                       <a:solidFill>
-                        <a:srgbClr val="F7D4E3"/>
+                        <a:srgbClr val="FAD1E2"/>
                       </a:solidFill>
                       <a:prstDash val="solid"/>
                     </a:lnL>
                     <a:lnR w="9525" cap="flat" cmpd="sng" algn="ctr">
                       <a:solidFill>
-                        <a:srgbClr val="F7D4E3"/>
+                        <a:srgbClr val="FAD1E2"/>
                       </a:solidFill>
                       <a:prstDash val="solid"/>
                     </a:lnR>
                     <a:lnT w="9525" cap="flat" cmpd="sng" algn="ctr">
                       <a:solidFill>
-                        <a:srgbClr val="F7D4E3"/>
+                        <a:srgbClr val="FAD1E2"/>
                       </a:solidFill>
                       <a:prstDash val="solid"/>
                     </a:lnT>
                     <a:lnB w="9525" cap="flat" cmpd="sng" algn="ctr">
                       <a:solidFill>
-                        <a:srgbClr val="F7D4E3"/>
+                        <a:srgbClr val="FAD1E2"/>
                       </a:solidFill>
                       <a:prstDash val="solid"/>
                     </a:lnB>
                     <a:solidFill>
-                      <a:srgbClr val="FCF3F7"/>
+                      <a:srgbClr val="FDEAF2"/>
                     </a:solidFill>
                   </a:tcPr>
                 </a:tc>
@@ -3742,7 +3877,7 @@
                       <a:r>
                         <a:rPr sz="1500" b="1">
                           <a:solidFill>
-                            <a:srgbClr val="6F1F41"/>
+                            <a:srgbClr val="492735"/>
                           </a:solidFill>
                         </a:rPr>
                         <a:t>생일</a:t>
@@ -3752,30 +3887,30 @@
                   <a:tcPr anchor="ctr" marL="73152" marR="73152">
                     <a:lnL w="9525" cap="flat" cmpd="sng" algn="ctr">
                       <a:solidFill>
-                        <a:srgbClr val="F7D4E3"/>
+                        <a:srgbClr val="FAD1E2"/>
                       </a:solidFill>
                       <a:prstDash val="solid"/>
                     </a:lnL>
                     <a:lnR w="9525" cap="flat" cmpd="sng" algn="ctr">
                       <a:solidFill>
-                        <a:srgbClr val="F7D4E3"/>
+                        <a:srgbClr val="FAD1E2"/>
                       </a:solidFill>
                       <a:prstDash val="solid"/>
                     </a:lnR>
                     <a:lnT w="9525" cap="flat" cmpd="sng" algn="ctr">
                       <a:solidFill>
-                        <a:srgbClr val="F7D4E3"/>
+                        <a:srgbClr val="FAD1E2"/>
                       </a:solidFill>
                       <a:prstDash val="solid"/>
                     </a:lnT>
                     <a:lnB w="9525" cap="flat" cmpd="sng" algn="ctr">
                       <a:solidFill>
-                        <a:srgbClr val="F7D4E3"/>
+                        <a:srgbClr val="FAD1E2"/>
                       </a:solidFill>
                       <a:prstDash val="solid"/>
                     </a:lnB>
                     <a:solidFill>
-                      <a:srgbClr val="F7D4E3"/>
+                      <a:srgbClr val="FAD1E2"/>
                     </a:solidFill>
                   </a:tcPr>
                 </a:tc>
@@ -3788,7 +3923,7 @@
                       <a:r>
                         <a:rPr sz="1500" b="0">
                           <a:solidFill>
-                            <a:srgbClr val="2B2B2B"/>
+                            <a:srgbClr val="26231F"/>
                           </a:solidFill>
                         </a:rPr>
                         <a:t>입력하세요</a:t>
@@ -3798,25 +3933,25 @@
                   <a:tcPr anchor="ctr" marL="73152" marR="73152">
                     <a:lnL w="9525" cap="flat" cmpd="sng" algn="ctr">
                       <a:solidFill>
-                        <a:srgbClr val="F7D4E3"/>
+                        <a:srgbClr val="FAD1E2"/>
                       </a:solidFill>
                       <a:prstDash val="solid"/>
                     </a:lnL>
                     <a:lnR w="9525" cap="flat" cmpd="sng" algn="ctr">
                       <a:solidFill>
-                        <a:srgbClr val="F7D4E3"/>
+                        <a:srgbClr val="FAD1E2"/>
                       </a:solidFill>
                       <a:prstDash val="solid"/>
                     </a:lnR>
                     <a:lnT w="9525" cap="flat" cmpd="sng" algn="ctr">
                       <a:solidFill>
-                        <a:srgbClr val="F7D4E3"/>
+                        <a:srgbClr val="FAD1E2"/>
                       </a:solidFill>
                       <a:prstDash val="solid"/>
                     </a:lnT>
                     <a:lnB w="9525" cap="flat" cmpd="sng" algn="ctr">
                       <a:solidFill>
-                        <a:srgbClr val="F7D4E3"/>
+                        <a:srgbClr val="FAD1E2"/>
                       </a:solidFill>
                       <a:prstDash val="solid"/>
                     </a:lnB>
@@ -3836,7 +3971,7 @@
                       <a:r>
                         <a:rPr sz="1500" b="1">
                           <a:solidFill>
-                            <a:srgbClr val="6F1F41"/>
+                            <a:srgbClr val="492735"/>
                           </a:solidFill>
                         </a:rPr>
                         <a:t>키 · 몸무게</a:t>
@@ -3846,30 +3981,30 @@
                   <a:tcPr anchor="ctr" marL="73152" marR="73152">
                     <a:lnL w="9525" cap="flat" cmpd="sng" algn="ctr">
                       <a:solidFill>
-                        <a:srgbClr val="F7D4E3"/>
+                        <a:srgbClr val="FAD1E2"/>
                       </a:solidFill>
                       <a:prstDash val="solid"/>
                     </a:lnL>
                     <a:lnR w="9525" cap="flat" cmpd="sng" algn="ctr">
                       <a:solidFill>
-                        <a:srgbClr val="F7D4E3"/>
+                        <a:srgbClr val="FAD1E2"/>
                       </a:solidFill>
                       <a:prstDash val="solid"/>
                     </a:lnR>
                     <a:lnT w="9525" cap="flat" cmpd="sng" algn="ctr">
                       <a:solidFill>
-                        <a:srgbClr val="F7D4E3"/>
+                        <a:srgbClr val="FAD1E2"/>
                       </a:solidFill>
                       <a:prstDash val="solid"/>
                     </a:lnT>
                     <a:lnB w="9525" cap="flat" cmpd="sng" algn="ctr">
                       <a:solidFill>
-                        <a:srgbClr val="F7D4E3"/>
+                        <a:srgbClr val="FAD1E2"/>
                       </a:solidFill>
                       <a:prstDash val="solid"/>
                     </a:lnB>
                     <a:solidFill>
-                      <a:srgbClr val="F7D4E3"/>
+                      <a:srgbClr val="FAD1E2"/>
                     </a:solidFill>
                   </a:tcPr>
                 </a:tc>
@@ -3882,7 +4017,7 @@
                       <a:r>
                         <a:rPr sz="1500" b="0">
                           <a:solidFill>
-                            <a:srgbClr val="2B2B2B"/>
+                            <a:srgbClr val="26231F"/>
                           </a:solidFill>
                         </a:rPr>
                         <a:t>입력하세요</a:t>
@@ -3892,30 +4027,30 @@
                   <a:tcPr anchor="ctr" marL="73152" marR="73152">
                     <a:lnL w="9525" cap="flat" cmpd="sng" algn="ctr">
                       <a:solidFill>
-                        <a:srgbClr val="F7D4E3"/>
+                        <a:srgbClr val="FAD1E2"/>
                       </a:solidFill>
                       <a:prstDash val="solid"/>
                     </a:lnL>
                     <a:lnR w="9525" cap="flat" cmpd="sng" algn="ctr">
                       <a:solidFill>
-                        <a:srgbClr val="F7D4E3"/>
+                        <a:srgbClr val="FAD1E2"/>
                       </a:solidFill>
                       <a:prstDash val="solid"/>
                     </a:lnR>
                     <a:lnT w="9525" cap="flat" cmpd="sng" algn="ctr">
                       <a:solidFill>
-                        <a:srgbClr val="F7D4E3"/>
+                        <a:srgbClr val="FAD1E2"/>
                       </a:solidFill>
                       <a:prstDash val="solid"/>
                     </a:lnT>
                     <a:lnB w="9525" cap="flat" cmpd="sng" algn="ctr">
                       <a:solidFill>
-                        <a:srgbClr val="F7D4E3"/>
+                        <a:srgbClr val="FAD1E2"/>
                       </a:solidFill>
                       <a:prstDash val="solid"/>
                     </a:lnB>
                     <a:solidFill>
-                      <a:srgbClr val="FCF3F7"/>
+                      <a:srgbClr val="FDEAF2"/>
                     </a:solidFill>
                   </a:tcPr>
                 </a:tc>
@@ -3930,7 +4065,7 @@
                       <a:r>
                         <a:rPr sz="1500" b="1">
                           <a:solidFill>
-                            <a:srgbClr val="6F1F41"/>
+                            <a:srgbClr val="492735"/>
                           </a:solidFill>
                         </a:rPr>
                         <a:t>좋아하는 것</a:t>
@@ -3940,30 +4075,30 @@
                   <a:tcPr anchor="ctr" marL="73152" marR="73152">
                     <a:lnL w="9525" cap="flat" cmpd="sng" algn="ctr">
                       <a:solidFill>
-                        <a:srgbClr val="F7D4E3"/>
+                        <a:srgbClr val="FAD1E2"/>
                       </a:solidFill>
                       <a:prstDash val="solid"/>
                     </a:lnL>
                     <a:lnR w="9525" cap="flat" cmpd="sng" algn="ctr">
                       <a:solidFill>
-                        <a:srgbClr val="F7D4E3"/>
+                        <a:srgbClr val="FAD1E2"/>
                       </a:solidFill>
                       <a:prstDash val="solid"/>
                     </a:lnR>
                     <a:lnT w="9525" cap="flat" cmpd="sng" algn="ctr">
                       <a:solidFill>
-                        <a:srgbClr val="F7D4E3"/>
+                        <a:srgbClr val="FAD1E2"/>
                       </a:solidFill>
                       <a:prstDash val="solid"/>
                     </a:lnT>
                     <a:lnB w="9525" cap="flat" cmpd="sng" algn="ctr">
                       <a:solidFill>
-                        <a:srgbClr val="F7D4E3"/>
+                        <a:srgbClr val="FAD1E2"/>
                       </a:solidFill>
                       <a:prstDash val="solid"/>
                     </a:lnB>
                     <a:solidFill>
-                      <a:srgbClr val="F7D4E3"/>
+                      <a:srgbClr val="FAD1E2"/>
                     </a:solidFill>
                   </a:tcPr>
                 </a:tc>
@@ -3976,7 +4111,7 @@
                       <a:r>
                         <a:rPr sz="1500" b="0">
                           <a:solidFill>
-                            <a:srgbClr val="2B2B2B"/>
+                            <a:srgbClr val="26231F"/>
                           </a:solidFill>
                         </a:rPr>
                         <a:t>입력하세요</a:t>
@@ -3986,25 +4121,25 @@
                   <a:tcPr anchor="ctr" marL="73152" marR="73152">
                     <a:lnL w="9525" cap="flat" cmpd="sng" algn="ctr">
                       <a:solidFill>
-                        <a:srgbClr val="F7D4E3"/>
+                        <a:srgbClr val="FAD1E2"/>
                       </a:solidFill>
                       <a:prstDash val="solid"/>
                     </a:lnL>
                     <a:lnR w="9525" cap="flat" cmpd="sng" algn="ctr">
                       <a:solidFill>
-                        <a:srgbClr val="F7D4E3"/>
+                        <a:srgbClr val="FAD1E2"/>
                       </a:solidFill>
                       <a:prstDash val="solid"/>
                     </a:lnR>
                     <a:lnT w="9525" cap="flat" cmpd="sng" algn="ctr">
                       <a:solidFill>
-                        <a:srgbClr val="F7D4E3"/>
+                        <a:srgbClr val="FAD1E2"/>
                       </a:solidFill>
                       <a:prstDash val="solid"/>
                     </a:lnT>
                     <a:lnB w="9525" cap="flat" cmpd="sng" algn="ctr">
                       <a:solidFill>
-                        <a:srgbClr val="F7D4E3"/>
+                        <a:srgbClr val="FAD1E2"/>
                       </a:solidFill>
                       <a:prstDash val="solid"/>
                     </a:lnB>
@@ -4024,7 +4159,7 @@
                       <a:r>
                         <a:rPr sz="1500" b="1">
                           <a:solidFill>
-                            <a:srgbClr val="6F1F41"/>
+                            <a:srgbClr val="492735"/>
                           </a:solidFill>
                         </a:rPr>
                         <a:t>별명</a:t>
@@ -4034,30 +4169,30 @@
                   <a:tcPr anchor="ctr" marL="73152" marR="73152">
                     <a:lnL w="9525" cap="flat" cmpd="sng" algn="ctr">
                       <a:solidFill>
-                        <a:srgbClr val="F7D4E3"/>
+                        <a:srgbClr val="FAD1E2"/>
                       </a:solidFill>
                       <a:prstDash val="solid"/>
                     </a:lnL>
                     <a:lnR w="9525" cap="flat" cmpd="sng" algn="ctr">
                       <a:solidFill>
-                        <a:srgbClr val="F7D4E3"/>
+                        <a:srgbClr val="FAD1E2"/>
                       </a:solidFill>
                       <a:prstDash val="solid"/>
                     </a:lnR>
                     <a:lnT w="9525" cap="flat" cmpd="sng" algn="ctr">
                       <a:solidFill>
-                        <a:srgbClr val="F7D4E3"/>
+                        <a:srgbClr val="FAD1E2"/>
                       </a:solidFill>
                       <a:prstDash val="solid"/>
                     </a:lnT>
                     <a:lnB w="9525" cap="flat" cmpd="sng" algn="ctr">
                       <a:solidFill>
-                        <a:srgbClr val="F7D4E3"/>
+                        <a:srgbClr val="FAD1E2"/>
                       </a:solidFill>
                       <a:prstDash val="solid"/>
                     </a:lnB>
                     <a:solidFill>
-                      <a:srgbClr val="F7D4E3"/>
+                      <a:srgbClr val="FAD1E2"/>
                     </a:solidFill>
                   </a:tcPr>
                 </a:tc>
@@ -4070,7 +4205,7 @@
                       <a:r>
                         <a:rPr sz="1500" b="0">
                           <a:solidFill>
-                            <a:srgbClr val="2B2B2B"/>
+                            <a:srgbClr val="26231F"/>
                           </a:solidFill>
                         </a:rPr>
                         <a:t>입력하세요</a:t>
@@ -4080,30 +4215,30 @@
                   <a:tcPr anchor="ctr" marL="73152" marR="73152">
                     <a:lnL w="9525" cap="flat" cmpd="sng" algn="ctr">
                       <a:solidFill>
-                        <a:srgbClr val="F7D4E3"/>
+                        <a:srgbClr val="FAD1E2"/>
                       </a:solidFill>
                       <a:prstDash val="solid"/>
                     </a:lnL>
                     <a:lnR w="9525" cap="flat" cmpd="sng" algn="ctr">
                       <a:solidFill>
-                        <a:srgbClr val="F7D4E3"/>
+                        <a:srgbClr val="FAD1E2"/>
                       </a:solidFill>
                       <a:prstDash val="solid"/>
                     </a:lnR>
                     <a:lnT w="9525" cap="flat" cmpd="sng" algn="ctr">
                       <a:solidFill>
-                        <a:srgbClr val="F7D4E3"/>
+                        <a:srgbClr val="FAD1E2"/>
                       </a:solidFill>
                       <a:prstDash val="solid"/>
                     </a:lnT>
                     <a:lnB w="9525" cap="flat" cmpd="sng" algn="ctr">
                       <a:solidFill>
-                        <a:srgbClr val="F7D4E3"/>
+                        <a:srgbClr val="FAD1E2"/>
                       </a:solidFill>
                       <a:prstDash val="solid"/>
                     </a:lnB>
                     <a:solidFill>
-                      <a:srgbClr val="FCF3F7"/>
+                      <a:srgbClr val="FDEAF2"/>
                     </a:solidFill>
                   </a:tcPr>
                 </a:tc>
@@ -4118,7 +4253,7 @@
                       <a:r>
                         <a:rPr sz="1500" b="1">
                           <a:solidFill>
-                            <a:srgbClr val="6F1F41"/>
+                            <a:srgbClr val="492735"/>
                           </a:solidFill>
                         </a:rPr>
                         <a:t>부모의 마음</a:t>
@@ -4128,30 +4263,30 @@
                   <a:tcPr anchor="ctr" marL="73152" marR="73152">
                     <a:lnL w="9525" cap="flat" cmpd="sng" algn="ctr">
                       <a:solidFill>
-                        <a:srgbClr val="F7D4E3"/>
+                        <a:srgbClr val="FAD1E2"/>
                       </a:solidFill>
                       <a:prstDash val="solid"/>
                     </a:lnL>
                     <a:lnR w="9525" cap="flat" cmpd="sng" algn="ctr">
                       <a:solidFill>
-                        <a:srgbClr val="F7D4E3"/>
+                        <a:srgbClr val="FAD1E2"/>
                       </a:solidFill>
                       <a:prstDash val="solid"/>
                     </a:lnR>
                     <a:lnT w="9525" cap="flat" cmpd="sng" algn="ctr">
                       <a:solidFill>
-                        <a:srgbClr val="F7D4E3"/>
+                        <a:srgbClr val="FAD1E2"/>
                       </a:solidFill>
                       <a:prstDash val="solid"/>
                     </a:lnT>
                     <a:lnB w="9525" cap="flat" cmpd="sng" algn="ctr">
                       <a:solidFill>
-                        <a:srgbClr val="F7D4E3"/>
+                        <a:srgbClr val="FAD1E2"/>
                       </a:solidFill>
                       <a:prstDash val="solid"/>
                     </a:lnB>
                     <a:solidFill>
-                      <a:srgbClr val="F7D4E3"/>
+                      <a:srgbClr val="FAD1E2"/>
                     </a:solidFill>
                   </a:tcPr>
                 </a:tc>
@@ -4164,7 +4299,7 @@
                       <a:r>
                         <a:rPr sz="1500" b="0">
                           <a:solidFill>
-                            <a:srgbClr val="2B2B2B"/>
+                            <a:srgbClr val="26231F"/>
                           </a:solidFill>
                         </a:rPr>
                         <a:t>입력하세요</a:t>
@@ -4174,25 +4309,25 @@
                   <a:tcPr anchor="ctr" marL="73152" marR="73152">
                     <a:lnL w="9525" cap="flat" cmpd="sng" algn="ctr">
                       <a:solidFill>
-                        <a:srgbClr val="F7D4E3"/>
+                        <a:srgbClr val="FAD1E2"/>
                       </a:solidFill>
                       <a:prstDash val="solid"/>
                     </a:lnL>
                     <a:lnR w="9525" cap="flat" cmpd="sng" algn="ctr">
                       <a:solidFill>
-                        <a:srgbClr val="F7D4E3"/>
+                        <a:srgbClr val="FAD1E2"/>
                       </a:solidFill>
                       <a:prstDash val="solid"/>
                     </a:lnR>
                     <a:lnT w="9525" cap="flat" cmpd="sng" algn="ctr">
                       <a:solidFill>
-                        <a:srgbClr val="F7D4E3"/>
+                        <a:srgbClr val="FAD1E2"/>
                       </a:solidFill>
                       <a:prstDash val="solid"/>
                     </a:lnT>
                     <a:lnB w="9525" cap="flat" cmpd="sng" algn="ctr">
                       <a:solidFill>
-                        <a:srgbClr val="F7D4E3"/>
+                        <a:srgbClr val="FAD1E2"/>
                       </a:solidFill>
                       <a:prstDash val="solid"/>
                     </a:lnB>
@@ -4220,7 +4355,7 @@
     <p:bg>
       <p:bgPr>
         <a:solidFill>
-          <a:srgbClr val="FCF3F7"/>
+          <a:srgbClr val="FDFAFB"/>
         </a:solidFill>
         <a:effectLst/>
       </p:bgPr>
@@ -4240,14 +4375,16 @@
         </p:nvSpPr>
         <p:spPr>
           <a:xfrm>
-            <a:off x="0" y="0"/>
-            <a:ext cx="12191695" cy="274320"/>
-          </a:xfrm>
-          <a:prstGeom prst="rect">
-            <a:avLst/>
+            <a:off x="640080" y="566928"/>
+            <a:ext cx="64008" cy="868680"/>
+          </a:xfrm>
+          <a:prstGeom prst="roundRect">
+            <a:avLst>
+              <a:gd name="adj" fmla="val 50000"/>
+            </a:avLst>
           </a:prstGeom>
           <a:solidFill>
-            <a:srgbClr val="CD4C82"/>
+            <a:srgbClr val="ED97BB"/>
           </a:solidFill>
           <a:ln>
             <a:noFill/>
@@ -4263,20 +4400,58 @@
       </p:sp>
       <p:sp>
         <p:nvSpPr>
-          <p:cNvPr id="4" name="장식"/>
-          <p:cNvSpPr/>
+          <p:cNvPr id="4" name="상단 라벨"/>
+          <p:cNvSpPr txBox="1"/>
           <p:nvPr/>
         </p:nvSpPr>
         <p:spPr>
           <a:xfrm>
-            <a:off x="0" y="274320"/>
-            <a:ext cx="12191695" cy="54864"/>
+            <a:off x="868680" y="274320"/>
+            <a:ext cx="5486400" cy="274320"/>
           </a:xfrm>
           <a:prstGeom prst="rect">
             <a:avLst/>
           </a:prstGeom>
+          <a:noFill/>
+        </p:spPr>
+        <p:txBody>
+          <a:bodyPr wrap="square" lIns="54864" rIns="54864" tIns="27432" bIns="27432" anchor="ctr">
+            <a:noAutofit/>
+          </a:bodyPr>
+          <a:lstStyle/>
+          <a:p>
+            <a:pPr algn="l">
+              <a:lnSpc>
+                <a:spcPct val="115000"/>
+              </a:lnSpc>
+            </a:pPr>
+            <a:r>
+              <a:rPr sz="900" b="1" i="0" spc="250">
+                <a:solidFill>
+                  <a:srgbClr val="8E8780"/>
+                </a:solidFill>
+              </a:rPr>
+              <a:t>FIRST BIRTHDAY</a:t>
+            </a:r>
+          </a:p>
+        </p:txBody>
+      </p:sp>
+      <p:sp>
+        <p:nvSpPr>
+          <p:cNvPr id="5" name="포인트"/>
+          <p:cNvSpPr/>
+          <p:nvPr/>
+        </p:nvSpPr>
+        <p:spPr>
+          <a:xfrm>
+            <a:off x="11167567" y="667512"/>
+            <a:ext cx="310896" cy="310896"/>
+          </a:xfrm>
+          <a:prstGeom prst="mathPlus">
+            <a:avLst/>
+          </a:prstGeom>
           <a:solidFill>
-            <a:srgbClr val="339941"/>
+            <a:srgbClr val="F2A6C6"/>
           </a:solidFill>
           <a:ln>
             <a:noFill/>
@@ -4302,8 +4477,8 @@
         </p:nvSpPr>
         <p:spPr>
           <a:xfrm>
-            <a:off x="640080" y="457200"/>
-            <a:ext cx="9722815" cy="868680"/>
+            <a:off x="868680" y="566928"/>
+            <a:ext cx="9448495" cy="868680"/>
           </a:xfrm>
         </p:spPr>
         <p:txBody>
@@ -4320,7 +4495,7 @@
             <a:r>
               <a:rPr sz="3000" b="1" i="0">
                 <a:solidFill>
-                  <a:srgbClr val="6F1F41"/>
+                  <a:srgbClr val="26231F"/>
                 </a:solidFill>
               </a:rPr>
               <a:t>한 해 성장 기록</a:t>
@@ -4330,20 +4505,20 @@
       </p:sp>
       <p:sp>
         <p:nvSpPr>
-          <p:cNvPr id="5" name="타임라인 선"/>
+          <p:cNvPr id="6" name="타임라인 선"/>
           <p:cNvSpPr/>
           <p:nvPr/>
         </p:nvSpPr>
         <p:spPr>
           <a:xfrm>
-            <a:off x="640080" y="3337560"/>
+            <a:off x="640080" y="3520440"/>
             <a:ext cx="10911535" cy="54864"/>
           </a:xfrm>
           <a:prstGeom prst="rect">
             <a:avLst/>
           </a:prstGeom>
           <a:solidFill>
-            <a:srgbClr val="F7D4E3"/>
+            <a:srgbClr val="FAD1E2"/>
           </a:solidFill>
           <a:ln>
             <a:noFill/>
@@ -4359,20 +4534,20 @@
       </p:sp>
       <p:sp>
         <p:nvSpPr>
-          <p:cNvPr id="6" name="때 1"/>
+          <p:cNvPr id="7" name="때 1"/>
           <p:cNvSpPr/>
           <p:nvPr/>
         </p:nvSpPr>
         <p:spPr>
           <a:xfrm>
-            <a:off x="1530065" y="3154680"/>
+            <a:off x="1530065" y="3337560"/>
             <a:ext cx="402336" cy="402336"/>
           </a:xfrm>
           <a:prstGeom prst="ellipse">
             <a:avLst/>
           </a:prstGeom>
           <a:solidFill>
-            <a:srgbClr val="CD4C82"/>
+            <a:srgbClr val="ED97BB"/>
           </a:solidFill>
           <a:ln w="38100">
             <a:solidFill>
@@ -4390,13 +4565,13 @@
       </p:sp>
       <p:sp>
         <p:nvSpPr>
-          <p:cNvPr id="7" name="TextBox 6"/>
+          <p:cNvPr id="8" name="TextBox 7"/>
           <p:cNvSpPr txBox="1"/>
           <p:nvPr/>
         </p:nvSpPr>
         <p:spPr>
           <a:xfrm>
-            <a:off x="685800" y="2514600"/>
+            <a:off x="685800" y="2697480"/>
             <a:ext cx="2090867" cy="457200"/>
           </a:xfrm>
           <a:prstGeom prst="rect">
@@ -4418,7 +4593,7 @@
             <a:r>
               <a:rPr sz="1400" b="1" i="0">
                 <a:solidFill>
-                  <a:srgbClr val="CD4C82"/>
+                  <a:srgbClr val="ED97BB"/>
                 </a:solidFill>
               </a:rPr>
               <a:t>1개월</a:t>
@@ -4428,13 +4603,13 @@
       </p:sp>
       <p:sp>
         <p:nvSpPr>
-          <p:cNvPr id="8" name="TextBox 7"/>
+          <p:cNvPr id="9" name="TextBox 8"/>
           <p:cNvSpPr txBox="1"/>
           <p:nvPr/>
         </p:nvSpPr>
         <p:spPr>
           <a:xfrm>
-            <a:off x="731519" y="3703320"/>
+            <a:off x="731519" y="3886200"/>
             <a:ext cx="1999427" cy="457200"/>
           </a:xfrm>
           <a:prstGeom prst="rect">
@@ -4456,7 +4631,7 @@
             <a:r>
               <a:rPr sz="1600" b="1" i="0">
                 <a:solidFill>
-                  <a:srgbClr val="6F1F41"/>
+                  <a:srgbClr val="492735"/>
                 </a:solidFill>
               </a:rPr>
               <a:t>처음 눈을 맞춘 날</a:t>
@@ -4466,13 +4641,13 @@
       </p:sp>
       <p:sp>
         <p:nvSpPr>
-          <p:cNvPr id="9" name="TextBox 8"/>
+          <p:cNvPr id="10" name="TextBox 9"/>
           <p:cNvSpPr txBox="1"/>
           <p:nvPr/>
         </p:nvSpPr>
         <p:spPr>
           <a:xfrm>
-            <a:off x="731519" y="4206240"/>
+            <a:off x="731519" y="4389120"/>
             <a:ext cx="1999427" cy="1645920"/>
           </a:xfrm>
           <a:prstGeom prst="rect">
@@ -4494,7 +4669,7 @@
             <a:r>
               <a:rPr sz="1300" b="0" i="0">
                 <a:solidFill>
-                  <a:srgbClr val="2B2B2B"/>
+                  <a:srgbClr val="26231F"/>
                 </a:solidFill>
               </a:rPr>
               <a:t>기억을 적어 주세요</a:t>
@@ -4504,20 +4679,20 @@
       </p:sp>
       <p:sp>
         <p:nvSpPr>
-          <p:cNvPr id="10" name="때 2"/>
+          <p:cNvPr id="11" name="때 2"/>
           <p:cNvSpPr/>
           <p:nvPr/>
         </p:nvSpPr>
         <p:spPr>
           <a:xfrm>
-            <a:off x="3712372" y="3154680"/>
+            <a:off x="3712372" y="3337560"/>
             <a:ext cx="402336" cy="402336"/>
           </a:xfrm>
           <a:prstGeom prst="ellipse">
             <a:avLst/>
           </a:prstGeom>
           <a:solidFill>
-            <a:srgbClr val="CD4C82"/>
+            <a:srgbClr val="ED97BB"/>
           </a:solidFill>
           <a:ln w="38100">
             <a:solidFill>
@@ -4535,13 +4710,13 @@
       </p:sp>
       <p:sp>
         <p:nvSpPr>
-          <p:cNvPr id="11" name="TextBox 10"/>
+          <p:cNvPr id="12" name="TextBox 11"/>
           <p:cNvSpPr txBox="1"/>
           <p:nvPr/>
         </p:nvSpPr>
         <p:spPr>
           <a:xfrm>
-            <a:off x="2868107" y="2514600"/>
+            <a:off x="2868107" y="2697480"/>
             <a:ext cx="2090867" cy="457200"/>
           </a:xfrm>
           <a:prstGeom prst="rect">
@@ -4563,7 +4738,7 @@
             <a:r>
               <a:rPr sz="1400" b="1" i="0">
                 <a:solidFill>
-                  <a:srgbClr val="CD4C82"/>
+                  <a:srgbClr val="ED97BB"/>
                 </a:solidFill>
               </a:rPr>
               <a:t>3개월</a:t>
@@ -4573,13 +4748,13 @@
       </p:sp>
       <p:sp>
         <p:nvSpPr>
-          <p:cNvPr id="12" name="TextBox 11"/>
+          <p:cNvPr id="13" name="TextBox 12"/>
           <p:cNvSpPr txBox="1"/>
           <p:nvPr/>
         </p:nvSpPr>
         <p:spPr>
           <a:xfrm>
-            <a:off x="2913827" y="3703320"/>
+            <a:off x="2913827" y="3886200"/>
             <a:ext cx="1999427" cy="457200"/>
           </a:xfrm>
           <a:prstGeom prst="rect">
@@ -4601,7 +4776,7 @@
             <a:r>
               <a:rPr sz="1600" b="1" i="0">
                 <a:solidFill>
-                  <a:srgbClr val="6F1F41"/>
+                  <a:srgbClr val="492735"/>
                 </a:solidFill>
               </a:rPr>
               <a:t>처음 웃은 날</a:t>
@@ -4611,13 +4786,13 @@
       </p:sp>
       <p:sp>
         <p:nvSpPr>
-          <p:cNvPr id="13" name="TextBox 12"/>
+          <p:cNvPr id="14" name="TextBox 13"/>
           <p:cNvSpPr txBox="1"/>
           <p:nvPr/>
         </p:nvSpPr>
         <p:spPr>
           <a:xfrm>
-            <a:off x="2913827" y="4206240"/>
+            <a:off x="2913827" y="4389120"/>
             <a:ext cx="1999427" cy="1645920"/>
           </a:xfrm>
           <a:prstGeom prst="rect">
@@ -4639,7 +4814,7 @@
             <a:r>
               <a:rPr sz="1300" b="0" i="0">
                 <a:solidFill>
-                  <a:srgbClr val="2B2B2B"/>
+                  <a:srgbClr val="26231F"/>
                 </a:solidFill>
               </a:rPr>
               <a:t>기억을 적어 주세요</a:t>
@@ -4649,20 +4824,20 @@
       </p:sp>
       <p:sp>
         <p:nvSpPr>
-          <p:cNvPr id="14" name="때 3"/>
+          <p:cNvPr id="15" name="때 3"/>
           <p:cNvSpPr/>
           <p:nvPr/>
         </p:nvSpPr>
         <p:spPr>
           <a:xfrm>
-            <a:off x="5894679" y="3154680"/>
+            <a:off x="5894679" y="3337560"/>
             <a:ext cx="402336" cy="402336"/>
           </a:xfrm>
           <a:prstGeom prst="ellipse">
             <a:avLst/>
           </a:prstGeom>
           <a:solidFill>
-            <a:srgbClr val="CD4C82"/>
+            <a:srgbClr val="ED97BB"/>
           </a:solidFill>
           <a:ln w="38100">
             <a:solidFill>
@@ -4680,13 +4855,13 @@
       </p:sp>
       <p:sp>
         <p:nvSpPr>
-          <p:cNvPr id="15" name="TextBox 14"/>
+          <p:cNvPr id="16" name="TextBox 15"/>
           <p:cNvSpPr txBox="1"/>
           <p:nvPr/>
         </p:nvSpPr>
         <p:spPr>
           <a:xfrm>
-            <a:off x="5050414" y="2514600"/>
+            <a:off x="5050414" y="2697480"/>
             <a:ext cx="2090867" cy="457200"/>
           </a:xfrm>
           <a:prstGeom prst="rect">
@@ -4708,7 +4883,7 @@
             <a:r>
               <a:rPr sz="1400" b="1" i="0">
                 <a:solidFill>
-                  <a:srgbClr val="CD4C82"/>
+                  <a:srgbClr val="ED97BB"/>
                 </a:solidFill>
               </a:rPr>
               <a:t>6개월</a:t>
@@ -4718,13 +4893,13 @@
       </p:sp>
       <p:sp>
         <p:nvSpPr>
-          <p:cNvPr id="16" name="TextBox 15"/>
+          <p:cNvPr id="17" name="TextBox 16"/>
           <p:cNvSpPr txBox="1"/>
           <p:nvPr/>
         </p:nvSpPr>
         <p:spPr>
           <a:xfrm>
-            <a:off x="5096134" y="3703320"/>
+            <a:off x="5096134" y="3886200"/>
             <a:ext cx="1999427" cy="457200"/>
           </a:xfrm>
           <a:prstGeom prst="rect">
@@ -4746,7 +4921,7 @@
             <a:r>
               <a:rPr sz="1600" b="1" i="0">
                 <a:solidFill>
-                  <a:srgbClr val="6F1F41"/>
+                  <a:srgbClr val="492735"/>
                 </a:solidFill>
               </a:rPr>
               <a:t>뒤집기 성공</a:t>
@@ -4756,13 +4931,13 @@
       </p:sp>
       <p:sp>
         <p:nvSpPr>
-          <p:cNvPr id="17" name="TextBox 16"/>
+          <p:cNvPr id="18" name="TextBox 17"/>
           <p:cNvSpPr txBox="1"/>
           <p:nvPr/>
         </p:nvSpPr>
         <p:spPr>
           <a:xfrm>
-            <a:off x="5096134" y="4206240"/>
+            <a:off x="5096134" y="4389120"/>
             <a:ext cx="1999427" cy="1645920"/>
           </a:xfrm>
           <a:prstGeom prst="rect">
@@ -4784,7 +4959,7 @@
             <a:r>
               <a:rPr sz="1300" b="0" i="0">
                 <a:solidFill>
-                  <a:srgbClr val="2B2B2B"/>
+                  <a:srgbClr val="26231F"/>
                 </a:solidFill>
               </a:rPr>
               <a:t>기억을 적어 주세요</a:t>
@@ -4794,20 +4969,20 @@
       </p:sp>
       <p:sp>
         <p:nvSpPr>
-          <p:cNvPr id="18" name="때 4"/>
+          <p:cNvPr id="19" name="때 4"/>
           <p:cNvSpPr/>
           <p:nvPr/>
         </p:nvSpPr>
         <p:spPr>
           <a:xfrm>
-            <a:off x="8076986" y="3154680"/>
+            <a:off x="8076986" y="3337560"/>
             <a:ext cx="402336" cy="402336"/>
           </a:xfrm>
           <a:prstGeom prst="ellipse">
             <a:avLst/>
           </a:prstGeom>
           <a:solidFill>
-            <a:srgbClr val="CD4C82"/>
+            <a:srgbClr val="ED97BB"/>
           </a:solidFill>
           <a:ln w="38100">
             <a:solidFill>
@@ -4825,13 +5000,13 @@
       </p:sp>
       <p:sp>
         <p:nvSpPr>
-          <p:cNvPr id="19" name="TextBox 18"/>
+          <p:cNvPr id="20" name="TextBox 19"/>
           <p:cNvSpPr txBox="1"/>
           <p:nvPr/>
         </p:nvSpPr>
         <p:spPr>
           <a:xfrm>
-            <a:off x="7232721" y="2514600"/>
+            <a:off x="7232721" y="2697480"/>
             <a:ext cx="2090867" cy="457200"/>
           </a:xfrm>
           <a:prstGeom prst="rect">
@@ -4853,7 +5028,7 @@
             <a:r>
               <a:rPr sz="1400" b="1" i="0">
                 <a:solidFill>
-                  <a:srgbClr val="CD4C82"/>
+                  <a:srgbClr val="ED97BB"/>
                 </a:solidFill>
               </a:rPr>
               <a:t>9개월</a:t>
@@ -4863,13 +5038,13 @@
       </p:sp>
       <p:sp>
         <p:nvSpPr>
-          <p:cNvPr id="20" name="TextBox 19"/>
+          <p:cNvPr id="21" name="TextBox 20"/>
           <p:cNvSpPr txBox="1"/>
           <p:nvPr/>
         </p:nvSpPr>
         <p:spPr>
           <a:xfrm>
-            <a:off x="7278441" y="3703320"/>
+            <a:off x="7278441" y="3886200"/>
             <a:ext cx="1999427" cy="457200"/>
           </a:xfrm>
           <a:prstGeom prst="rect">
@@ -4891,7 +5066,7 @@
             <a:r>
               <a:rPr sz="1600" b="1" i="0">
                 <a:solidFill>
-                  <a:srgbClr val="6F1F41"/>
+                  <a:srgbClr val="492735"/>
                 </a:solidFill>
               </a:rPr>
               <a:t>첫 이유식</a:t>
@@ -4901,13 +5076,13 @@
       </p:sp>
       <p:sp>
         <p:nvSpPr>
-          <p:cNvPr id="21" name="TextBox 20"/>
+          <p:cNvPr id="22" name="TextBox 21"/>
           <p:cNvSpPr txBox="1"/>
           <p:nvPr/>
         </p:nvSpPr>
         <p:spPr>
           <a:xfrm>
-            <a:off x="7278441" y="4206240"/>
+            <a:off x="7278441" y="4389120"/>
             <a:ext cx="1999427" cy="1645920"/>
           </a:xfrm>
           <a:prstGeom prst="rect">
@@ -4929,7 +5104,7 @@
             <a:r>
               <a:rPr sz="1300" b="0" i="0">
                 <a:solidFill>
-                  <a:srgbClr val="2B2B2B"/>
+                  <a:srgbClr val="26231F"/>
                 </a:solidFill>
               </a:rPr>
               <a:t>기억을 적어 주세요</a:t>
@@ -4939,20 +5114,20 @@
       </p:sp>
       <p:sp>
         <p:nvSpPr>
-          <p:cNvPr id="22" name="때 5"/>
+          <p:cNvPr id="23" name="때 5"/>
           <p:cNvSpPr/>
           <p:nvPr/>
         </p:nvSpPr>
         <p:spPr>
           <a:xfrm>
-            <a:off x="10259293" y="3154680"/>
+            <a:off x="10259293" y="3337560"/>
             <a:ext cx="402336" cy="402336"/>
           </a:xfrm>
           <a:prstGeom prst="ellipse">
             <a:avLst/>
           </a:prstGeom>
           <a:solidFill>
-            <a:srgbClr val="CD4C82"/>
+            <a:srgbClr val="ED97BB"/>
           </a:solidFill>
           <a:ln w="38100">
             <a:solidFill>
@@ -4970,13 +5145,13 @@
       </p:sp>
       <p:sp>
         <p:nvSpPr>
-          <p:cNvPr id="23" name="TextBox 22"/>
+          <p:cNvPr id="24" name="TextBox 23"/>
           <p:cNvSpPr txBox="1"/>
           <p:nvPr/>
         </p:nvSpPr>
         <p:spPr>
           <a:xfrm>
-            <a:off x="9415028" y="2514600"/>
+            <a:off x="9415028" y="2697480"/>
             <a:ext cx="2090867" cy="457200"/>
           </a:xfrm>
           <a:prstGeom prst="rect">
@@ -4998,7 +5173,7 @@
             <a:r>
               <a:rPr sz="1400" b="1" i="0">
                 <a:solidFill>
-                  <a:srgbClr val="CD4C82"/>
+                  <a:srgbClr val="ED97BB"/>
                 </a:solidFill>
               </a:rPr>
               <a:t>12개월</a:t>
@@ -5008,13 +5183,13 @@
       </p:sp>
       <p:sp>
         <p:nvSpPr>
-          <p:cNvPr id="24" name="TextBox 23"/>
+          <p:cNvPr id="25" name="TextBox 24"/>
           <p:cNvSpPr txBox="1"/>
           <p:nvPr/>
         </p:nvSpPr>
         <p:spPr>
           <a:xfrm>
-            <a:off x="9460748" y="3703320"/>
+            <a:off x="9460748" y="3886200"/>
             <a:ext cx="1999427" cy="457200"/>
           </a:xfrm>
           <a:prstGeom prst="rect">
@@ -5036,7 +5211,7 @@
             <a:r>
               <a:rPr sz="1600" b="1" i="0">
                 <a:solidFill>
-                  <a:srgbClr val="6F1F41"/>
+                  <a:srgbClr val="492735"/>
                 </a:solidFill>
               </a:rPr>
               <a:t>첫 걸음</a:t>
@@ -5046,13 +5221,13 @@
       </p:sp>
       <p:sp>
         <p:nvSpPr>
-          <p:cNvPr id="25" name="TextBox 24"/>
+          <p:cNvPr id="26" name="TextBox 25"/>
           <p:cNvSpPr txBox="1"/>
           <p:nvPr/>
         </p:nvSpPr>
         <p:spPr>
           <a:xfrm>
-            <a:off x="9460748" y="4206240"/>
+            <a:off x="9460748" y="4389120"/>
             <a:ext cx="1999427" cy="1645920"/>
           </a:xfrm>
           <a:prstGeom prst="rect">
@@ -5074,7 +5249,7 @@
             <a:r>
               <a:rPr sz="1300" b="0" i="0">
                 <a:solidFill>
-                  <a:srgbClr val="2B2B2B"/>
+                  <a:srgbClr val="26231F"/>
                 </a:solidFill>
               </a:rPr>
               <a:t>기억을 적어 주세요</a:t>
@@ -5096,7 +5271,7 @@
     <p:bg>
       <p:bgPr>
         <a:solidFill>
-          <a:srgbClr val="FCF3F7"/>
+          <a:srgbClr val="FDFAFB"/>
         </a:solidFill>
         <a:effectLst/>
       </p:bgPr>
@@ -5116,14 +5291,16 @@
         </p:nvSpPr>
         <p:spPr>
           <a:xfrm>
-            <a:off x="0" y="0"/>
-            <a:ext cx="12191695" cy="274320"/>
-          </a:xfrm>
-          <a:prstGeom prst="rect">
-            <a:avLst/>
+            <a:off x="640080" y="566928"/>
+            <a:ext cx="64008" cy="868680"/>
+          </a:xfrm>
+          <a:prstGeom prst="roundRect">
+            <a:avLst>
+              <a:gd name="adj" fmla="val 50000"/>
+            </a:avLst>
           </a:prstGeom>
           <a:solidFill>
-            <a:srgbClr val="CD4C82"/>
+            <a:srgbClr val="ED97BB"/>
           </a:solidFill>
           <a:ln>
             <a:noFill/>
@@ -5139,20 +5316,58 @@
       </p:sp>
       <p:sp>
         <p:nvSpPr>
-          <p:cNvPr id="4" name="장식"/>
-          <p:cNvSpPr/>
+          <p:cNvPr id="4" name="상단 라벨"/>
+          <p:cNvSpPr txBox="1"/>
           <p:nvPr/>
         </p:nvSpPr>
         <p:spPr>
           <a:xfrm>
-            <a:off x="0" y="274320"/>
-            <a:ext cx="12191695" cy="54864"/>
+            <a:off x="868680" y="274320"/>
+            <a:ext cx="5486400" cy="274320"/>
           </a:xfrm>
           <a:prstGeom prst="rect">
             <a:avLst/>
           </a:prstGeom>
+          <a:noFill/>
+        </p:spPr>
+        <p:txBody>
+          <a:bodyPr wrap="square" lIns="54864" rIns="54864" tIns="27432" bIns="27432" anchor="ctr">
+            <a:noAutofit/>
+          </a:bodyPr>
+          <a:lstStyle/>
+          <a:p>
+            <a:pPr algn="l">
+              <a:lnSpc>
+                <a:spcPct val="115000"/>
+              </a:lnSpc>
+            </a:pPr>
+            <a:r>
+              <a:rPr sz="900" b="1" i="0" spc="250">
+                <a:solidFill>
+                  <a:srgbClr val="8E8780"/>
+                </a:solidFill>
+              </a:rPr>
+              <a:t>FIRST BIRTHDAY</a:t>
+            </a:r>
+          </a:p>
+        </p:txBody>
+      </p:sp>
+      <p:sp>
+        <p:nvSpPr>
+          <p:cNvPr id="5" name="포인트"/>
+          <p:cNvSpPr/>
+          <p:nvPr/>
+        </p:nvSpPr>
+        <p:spPr>
+          <a:xfrm>
+            <a:off x="11167567" y="667512"/>
+            <a:ext cx="310896" cy="310896"/>
+          </a:xfrm>
+          <a:prstGeom prst="mathPlus">
+            <a:avLst/>
+          </a:prstGeom>
           <a:solidFill>
-            <a:srgbClr val="339941"/>
+            <a:srgbClr val="F2A6C6"/>
           </a:solidFill>
           <a:ln>
             <a:noFill/>
@@ -5178,8 +5393,8 @@
         </p:nvSpPr>
         <p:spPr>
           <a:xfrm>
-            <a:off x="640080" y="457200"/>
-            <a:ext cx="9722815" cy="868680"/>
+            <a:off x="868680" y="566928"/>
+            <a:ext cx="9448495" cy="868680"/>
           </a:xfrm>
         </p:spPr>
         <p:txBody>
@@ -5196,7 +5411,7 @@
             <a:r>
               <a:rPr sz="3000" b="1" i="0">
                 <a:solidFill>
-                  <a:srgbClr val="6F1F41"/>
+                  <a:srgbClr val="26231F"/>
                 </a:solidFill>
               </a:rPr>
               <a:t>키와 몸무게</a:t>
@@ -5206,14 +5421,14 @@
       </p:sp>
       <p:graphicFrame>
         <p:nvGraphicFramePr>
-          <p:cNvPr id="5" name="표"/>
+          <p:cNvPr id="6" name="표"/>
           <p:cNvGraphicFramePr>
             <a:graphicFrameLocks noGrp="1"/>
           </p:cNvGraphicFramePr>
           <p:nvPr/>
         </p:nvGraphicFramePr>
         <p:xfrm>
-          <a:off x="640080" y="1600200"/>
+          <a:off x="640080" y="1783080"/>
           <a:ext cx="10911535" cy="3291840"/>
         </p:xfrm>
         <a:graphic>
@@ -5239,7 +5454,7 @@
                       <a:r>
                         <a:rPr sz="1600" b="1">
                           <a:solidFill>
-                            <a:srgbClr val="FFFFFF"/>
+                            <a:srgbClr val="26231F"/>
                           </a:solidFill>
                         </a:rPr>
                         <a:t/>
@@ -5249,30 +5464,30 @@
                   <a:tcPr anchor="ctr" marL="73152" marR="73152">
                     <a:lnL w="9525" cap="flat" cmpd="sng" algn="ctr">
                       <a:solidFill>
-                        <a:srgbClr val="CD4C82"/>
+                        <a:srgbClr val="ED97BB"/>
                       </a:solidFill>
                       <a:prstDash val="solid"/>
                     </a:lnL>
                     <a:lnR w="9525" cap="flat" cmpd="sng" algn="ctr">
                       <a:solidFill>
-                        <a:srgbClr val="CD4C82"/>
+                        <a:srgbClr val="ED97BB"/>
                       </a:solidFill>
                       <a:prstDash val="solid"/>
                     </a:lnR>
                     <a:lnT w="9525" cap="flat" cmpd="sng" algn="ctr">
                       <a:solidFill>
-                        <a:srgbClr val="CD4C82"/>
+                        <a:srgbClr val="ED97BB"/>
                       </a:solidFill>
                       <a:prstDash val="solid"/>
                     </a:lnT>
                     <a:lnB w="9525" cap="flat" cmpd="sng" algn="ctr">
                       <a:solidFill>
-                        <a:srgbClr val="CD4C82"/>
+                        <a:srgbClr val="ED97BB"/>
                       </a:solidFill>
                       <a:prstDash val="solid"/>
                     </a:lnB>
                     <a:solidFill>
-                      <a:srgbClr val="CD4C82"/>
+                      <a:srgbClr val="ED97BB"/>
                     </a:solidFill>
                   </a:tcPr>
                 </a:tc>
@@ -5285,7 +5500,7 @@
                       <a:r>
                         <a:rPr sz="1600" b="1">
                           <a:solidFill>
-                            <a:srgbClr val="FFFFFF"/>
+                            <a:srgbClr val="26231F"/>
                           </a:solidFill>
                         </a:rPr>
                         <a:t>3개월</a:t>
@@ -5295,30 +5510,30 @@
                   <a:tcPr anchor="ctr" marL="73152" marR="73152">
                     <a:lnL w="9525" cap="flat" cmpd="sng" algn="ctr">
                       <a:solidFill>
-                        <a:srgbClr val="CD4C82"/>
+                        <a:srgbClr val="ED97BB"/>
                       </a:solidFill>
                       <a:prstDash val="solid"/>
                     </a:lnL>
                     <a:lnR w="9525" cap="flat" cmpd="sng" algn="ctr">
                       <a:solidFill>
-                        <a:srgbClr val="CD4C82"/>
+                        <a:srgbClr val="ED97BB"/>
                       </a:solidFill>
                       <a:prstDash val="solid"/>
                     </a:lnR>
                     <a:lnT w="9525" cap="flat" cmpd="sng" algn="ctr">
                       <a:solidFill>
-                        <a:srgbClr val="CD4C82"/>
+                        <a:srgbClr val="ED97BB"/>
                       </a:solidFill>
                       <a:prstDash val="solid"/>
                     </a:lnT>
                     <a:lnB w="9525" cap="flat" cmpd="sng" algn="ctr">
                       <a:solidFill>
-                        <a:srgbClr val="CD4C82"/>
+                        <a:srgbClr val="ED97BB"/>
                       </a:solidFill>
                       <a:prstDash val="solid"/>
                     </a:lnB>
                     <a:solidFill>
-                      <a:srgbClr val="CD4C82"/>
+                      <a:srgbClr val="ED97BB"/>
                     </a:solidFill>
                   </a:tcPr>
                 </a:tc>
@@ -5331,7 +5546,7 @@
                       <a:r>
                         <a:rPr sz="1600" b="1">
                           <a:solidFill>
-                            <a:srgbClr val="FFFFFF"/>
+                            <a:srgbClr val="26231F"/>
                           </a:solidFill>
                         </a:rPr>
                         <a:t>6개월</a:t>
@@ -5341,30 +5556,30 @@
                   <a:tcPr anchor="ctr" marL="73152" marR="73152">
                     <a:lnL w="9525" cap="flat" cmpd="sng" algn="ctr">
                       <a:solidFill>
-                        <a:srgbClr val="CD4C82"/>
+                        <a:srgbClr val="ED97BB"/>
                       </a:solidFill>
                       <a:prstDash val="solid"/>
                     </a:lnL>
                     <a:lnR w="9525" cap="flat" cmpd="sng" algn="ctr">
                       <a:solidFill>
-                        <a:srgbClr val="CD4C82"/>
+                        <a:srgbClr val="ED97BB"/>
                       </a:solidFill>
                       <a:prstDash val="solid"/>
                     </a:lnR>
                     <a:lnT w="9525" cap="flat" cmpd="sng" algn="ctr">
                       <a:solidFill>
-                        <a:srgbClr val="CD4C82"/>
+                        <a:srgbClr val="ED97BB"/>
                       </a:solidFill>
                       <a:prstDash val="solid"/>
                     </a:lnT>
                     <a:lnB w="9525" cap="flat" cmpd="sng" algn="ctr">
                       <a:solidFill>
-                        <a:srgbClr val="CD4C82"/>
+                        <a:srgbClr val="ED97BB"/>
                       </a:solidFill>
                       <a:prstDash val="solid"/>
                     </a:lnB>
                     <a:solidFill>
-                      <a:srgbClr val="CD4C82"/>
+                      <a:srgbClr val="ED97BB"/>
                     </a:solidFill>
                   </a:tcPr>
                 </a:tc>
@@ -5377,7 +5592,7 @@
                       <a:r>
                         <a:rPr sz="1600" b="1">
                           <a:solidFill>
-                            <a:srgbClr val="FFFFFF"/>
+                            <a:srgbClr val="26231F"/>
                           </a:solidFill>
                         </a:rPr>
                         <a:t>9개월</a:t>
@@ -5387,30 +5602,30 @@
                   <a:tcPr anchor="ctr" marL="73152" marR="73152">
                     <a:lnL w="9525" cap="flat" cmpd="sng" algn="ctr">
                       <a:solidFill>
-                        <a:srgbClr val="CD4C82"/>
+                        <a:srgbClr val="ED97BB"/>
                       </a:solidFill>
                       <a:prstDash val="solid"/>
                     </a:lnL>
                     <a:lnR w="9525" cap="flat" cmpd="sng" algn="ctr">
                       <a:solidFill>
-                        <a:srgbClr val="CD4C82"/>
+                        <a:srgbClr val="ED97BB"/>
                       </a:solidFill>
                       <a:prstDash val="solid"/>
                     </a:lnR>
                     <a:lnT w="9525" cap="flat" cmpd="sng" algn="ctr">
                       <a:solidFill>
-                        <a:srgbClr val="CD4C82"/>
+                        <a:srgbClr val="ED97BB"/>
                       </a:solidFill>
                       <a:prstDash val="solid"/>
                     </a:lnT>
                     <a:lnB w="9525" cap="flat" cmpd="sng" algn="ctr">
                       <a:solidFill>
-                        <a:srgbClr val="CD4C82"/>
+                        <a:srgbClr val="ED97BB"/>
                       </a:solidFill>
                       <a:prstDash val="solid"/>
                     </a:lnB>
                     <a:solidFill>
-                      <a:srgbClr val="CD4C82"/>
+                      <a:srgbClr val="ED97BB"/>
                     </a:solidFill>
                   </a:tcPr>
                 </a:tc>
@@ -5423,7 +5638,7 @@
                       <a:r>
                         <a:rPr sz="1600" b="1">
                           <a:solidFill>
-                            <a:srgbClr val="FFFFFF"/>
+                            <a:srgbClr val="26231F"/>
                           </a:solidFill>
                         </a:rPr>
                         <a:t>12개월</a:t>
@@ -5433,30 +5648,30 @@
                   <a:tcPr anchor="ctr" marL="73152" marR="73152">
                     <a:lnL w="9525" cap="flat" cmpd="sng" algn="ctr">
                       <a:solidFill>
-                        <a:srgbClr val="CD4C82"/>
+                        <a:srgbClr val="ED97BB"/>
                       </a:solidFill>
                       <a:prstDash val="solid"/>
                     </a:lnL>
                     <a:lnR w="9525" cap="flat" cmpd="sng" algn="ctr">
                       <a:solidFill>
-                        <a:srgbClr val="CD4C82"/>
+                        <a:srgbClr val="ED97BB"/>
                       </a:solidFill>
                       <a:prstDash val="solid"/>
                     </a:lnR>
                     <a:lnT w="9525" cap="flat" cmpd="sng" algn="ctr">
                       <a:solidFill>
-                        <a:srgbClr val="CD4C82"/>
+                        <a:srgbClr val="ED97BB"/>
                       </a:solidFill>
                       <a:prstDash val="solid"/>
                     </a:lnT>
                     <a:lnB w="9525" cap="flat" cmpd="sng" algn="ctr">
                       <a:solidFill>
-                        <a:srgbClr val="CD4C82"/>
+                        <a:srgbClr val="ED97BB"/>
                       </a:solidFill>
                       <a:prstDash val="solid"/>
                     </a:lnB>
                     <a:solidFill>
-                      <a:srgbClr val="CD4C82"/>
+                      <a:srgbClr val="ED97BB"/>
                     </a:solidFill>
                   </a:tcPr>
                 </a:tc>
@@ -5471,7 +5686,7 @@
                       <a:r>
                         <a:rPr sz="1600" b="1">
                           <a:solidFill>
-                            <a:srgbClr val="6F1F41"/>
+                            <a:srgbClr val="492735"/>
                           </a:solidFill>
                         </a:rPr>
                         <a:t>키(cm)</a:t>
@@ -5481,30 +5696,30 @@
                   <a:tcPr anchor="ctr" marL="73152" marR="73152">
                     <a:lnL w="9525" cap="flat" cmpd="sng" algn="ctr">
                       <a:solidFill>
-                        <a:srgbClr val="F7D4E3"/>
+                        <a:srgbClr val="FAD1E2"/>
                       </a:solidFill>
                       <a:prstDash val="solid"/>
                     </a:lnL>
                     <a:lnR w="9525" cap="flat" cmpd="sng" algn="ctr">
                       <a:solidFill>
-                        <a:srgbClr val="F7D4E3"/>
+                        <a:srgbClr val="FAD1E2"/>
                       </a:solidFill>
                       <a:prstDash val="solid"/>
                     </a:lnR>
                     <a:lnT w="9525" cap="flat" cmpd="sng" algn="ctr">
                       <a:solidFill>
-                        <a:srgbClr val="F7D4E3"/>
+                        <a:srgbClr val="FAD1E2"/>
                       </a:solidFill>
                       <a:prstDash val="solid"/>
                     </a:lnT>
                     <a:lnB w="9525" cap="flat" cmpd="sng" algn="ctr">
                       <a:solidFill>
-                        <a:srgbClr val="F7D4E3"/>
+                        <a:srgbClr val="FAD1E2"/>
                       </a:solidFill>
                       <a:prstDash val="solid"/>
                     </a:lnB>
                     <a:solidFill>
-                      <a:srgbClr val="F7D4E3"/>
+                      <a:srgbClr val="FAD1E2"/>
                     </a:solidFill>
                   </a:tcPr>
                 </a:tc>
@@ -5517,7 +5732,7 @@
                       <a:r>
                         <a:rPr sz="1600" b="0">
                           <a:solidFill>
-                            <a:srgbClr val="2B2B2B"/>
+                            <a:srgbClr val="26231F"/>
                           </a:solidFill>
                         </a:rPr>
                         <a:t/>
@@ -5527,25 +5742,25 @@
                   <a:tcPr anchor="ctr" marL="73152" marR="73152">
                     <a:lnL w="9525" cap="flat" cmpd="sng" algn="ctr">
                       <a:solidFill>
-                        <a:srgbClr val="F7D4E3"/>
+                        <a:srgbClr val="FAD1E2"/>
                       </a:solidFill>
                       <a:prstDash val="solid"/>
                     </a:lnL>
                     <a:lnR w="9525" cap="flat" cmpd="sng" algn="ctr">
                       <a:solidFill>
-                        <a:srgbClr val="F7D4E3"/>
+                        <a:srgbClr val="FAD1E2"/>
                       </a:solidFill>
                       <a:prstDash val="solid"/>
                     </a:lnR>
                     <a:lnT w="9525" cap="flat" cmpd="sng" algn="ctr">
                       <a:solidFill>
-                        <a:srgbClr val="F7D4E3"/>
+                        <a:srgbClr val="FAD1E2"/>
                       </a:solidFill>
                       <a:prstDash val="solid"/>
                     </a:lnT>
                     <a:lnB w="9525" cap="flat" cmpd="sng" algn="ctr">
                       <a:solidFill>
-                        <a:srgbClr val="F7D4E3"/>
+                        <a:srgbClr val="FAD1E2"/>
                       </a:solidFill>
                       <a:prstDash val="solid"/>
                     </a:lnB>
@@ -5563,7 +5778,7 @@
                       <a:r>
                         <a:rPr sz="1600" b="0">
                           <a:solidFill>
-                            <a:srgbClr val="2B2B2B"/>
+                            <a:srgbClr val="26231F"/>
                           </a:solidFill>
                         </a:rPr>
                         <a:t/>
@@ -5573,25 +5788,25 @@
                   <a:tcPr anchor="ctr" marL="73152" marR="73152">
                     <a:lnL w="9525" cap="flat" cmpd="sng" algn="ctr">
                       <a:solidFill>
-                        <a:srgbClr val="F7D4E3"/>
+                        <a:srgbClr val="FAD1E2"/>
                       </a:solidFill>
                       <a:prstDash val="solid"/>
                     </a:lnL>
                     <a:lnR w="9525" cap="flat" cmpd="sng" algn="ctr">
                       <a:solidFill>
-                        <a:srgbClr val="F7D4E3"/>
+                        <a:srgbClr val="FAD1E2"/>
                       </a:solidFill>
                       <a:prstDash val="solid"/>
                     </a:lnR>
                     <a:lnT w="9525" cap="flat" cmpd="sng" algn="ctr">
                       <a:solidFill>
-                        <a:srgbClr val="F7D4E3"/>
+                        <a:srgbClr val="FAD1E2"/>
                       </a:solidFill>
                       <a:prstDash val="solid"/>
                     </a:lnT>
                     <a:lnB w="9525" cap="flat" cmpd="sng" algn="ctr">
                       <a:solidFill>
-                        <a:srgbClr val="F7D4E3"/>
+                        <a:srgbClr val="FAD1E2"/>
                       </a:solidFill>
                       <a:prstDash val="solid"/>
                     </a:lnB>
@@ -5609,7 +5824,7 @@
                       <a:r>
                         <a:rPr sz="1600" b="0">
                           <a:solidFill>
-                            <a:srgbClr val="2B2B2B"/>
+                            <a:srgbClr val="26231F"/>
                           </a:solidFill>
                         </a:rPr>
                         <a:t/>
@@ -5619,25 +5834,25 @@
                   <a:tcPr anchor="ctr" marL="73152" marR="73152">
                     <a:lnL w="9525" cap="flat" cmpd="sng" algn="ctr">
                       <a:solidFill>
-                        <a:srgbClr val="F7D4E3"/>
+                        <a:srgbClr val="FAD1E2"/>
                       </a:solidFill>
                       <a:prstDash val="solid"/>
                     </a:lnL>
                     <a:lnR w="9525" cap="flat" cmpd="sng" algn="ctr">
                       <a:solidFill>
-                        <a:srgbClr val="F7D4E3"/>
+                        <a:srgbClr val="FAD1E2"/>
                       </a:solidFill>
                       <a:prstDash val="solid"/>
                     </a:lnR>
                     <a:lnT w="9525" cap="flat" cmpd="sng" algn="ctr">
                       <a:solidFill>
-                        <a:srgbClr val="F7D4E3"/>
+                        <a:srgbClr val="FAD1E2"/>
                       </a:solidFill>
                       <a:prstDash val="solid"/>
                     </a:lnT>
                     <a:lnB w="9525" cap="flat" cmpd="sng" algn="ctr">
                       <a:solidFill>
-                        <a:srgbClr val="F7D4E3"/>
+                        <a:srgbClr val="FAD1E2"/>
                       </a:solidFill>
                       <a:prstDash val="solid"/>
                     </a:lnB>
@@ -5655,7 +5870,7 @@
                       <a:r>
                         <a:rPr sz="1600" b="0">
                           <a:solidFill>
-                            <a:srgbClr val="2B2B2B"/>
+                            <a:srgbClr val="26231F"/>
                           </a:solidFill>
                         </a:rPr>
                         <a:t/>
@@ -5665,25 +5880,25 @@
                   <a:tcPr anchor="ctr" marL="73152" marR="73152">
                     <a:lnL w="9525" cap="flat" cmpd="sng" algn="ctr">
                       <a:solidFill>
-                        <a:srgbClr val="F7D4E3"/>
+                        <a:srgbClr val="FAD1E2"/>
                       </a:solidFill>
                       <a:prstDash val="solid"/>
                     </a:lnL>
                     <a:lnR w="9525" cap="flat" cmpd="sng" algn="ctr">
                       <a:solidFill>
-                        <a:srgbClr val="F7D4E3"/>
+                        <a:srgbClr val="FAD1E2"/>
                       </a:solidFill>
                       <a:prstDash val="solid"/>
                     </a:lnR>
                     <a:lnT w="9525" cap="flat" cmpd="sng" algn="ctr">
                       <a:solidFill>
-                        <a:srgbClr val="F7D4E3"/>
+                        <a:srgbClr val="FAD1E2"/>
                       </a:solidFill>
                       <a:prstDash val="solid"/>
                     </a:lnT>
                     <a:lnB w="9525" cap="flat" cmpd="sng" algn="ctr">
                       <a:solidFill>
-                        <a:srgbClr val="F7D4E3"/>
+                        <a:srgbClr val="FAD1E2"/>
                       </a:solidFill>
                       <a:prstDash val="solid"/>
                     </a:lnB>
@@ -5703,7 +5918,7 @@
                       <a:r>
                         <a:rPr sz="1600" b="1">
                           <a:solidFill>
-                            <a:srgbClr val="6F1F41"/>
+                            <a:srgbClr val="492735"/>
                           </a:solidFill>
                         </a:rPr>
                         <a:t>몸무게(kg)</a:t>
@@ -5713,30 +5928,30 @@
                   <a:tcPr anchor="ctr" marL="73152" marR="73152">
                     <a:lnL w="9525" cap="flat" cmpd="sng" algn="ctr">
                       <a:solidFill>
-                        <a:srgbClr val="F7D4E3"/>
+                        <a:srgbClr val="FAD1E2"/>
                       </a:solidFill>
                       <a:prstDash val="solid"/>
                     </a:lnL>
                     <a:lnR w="9525" cap="flat" cmpd="sng" algn="ctr">
                       <a:solidFill>
-                        <a:srgbClr val="F7D4E3"/>
+                        <a:srgbClr val="FAD1E2"/>
                       </a:solidFill>
                       <a:prstDash val="solid"/>
                     </a:lnR>
                     <a:lnT w="9525" cap="flat" cmpd="sng" algn="ctr">
                       <a:solidFill>
-                        <a:srgbClr val="F7D4E3"/>
+                        <a:srgbClr val="FAD1E2"/>
                       </a:solidFill>
                       <a:prstDash val="solid"/>
                     </a:lnT>
                     <a:lnB w="9525" cap="flat" cmpd="sng" algn="ctr">
                       <a:solidFill>
-                        <a:srgbClr val="F7D4E3"/>
+                        <a:srgbClr val="FAD1E2"/>
                       </a:solidFill>
                       <a:prstDash val="solid"/>
                     </a:lnB>
                     <a:solidFill>
-                      <a:srgbClr val="F7D4E3"/>
+                      <a:srgbClr val="FAD1E2"/>
                     </a:solidFill>
                   </a:tcPr>
                 </a:tc>
@@ -5749,7 +5964,7 @@
                       <a:r>
                         <a:rPr sz="1600" b="0">
                           <a:solidFill>
-                            <a:srgbClr val="2B2B2B"/>
+                            <a:srgbClr val="26231F"/>
                           </a:solidFill>
                         </a:rPr>
                         <a:t/>
@@ -5759,30 +5974,30 @@
                   <a:tcPr anchor="ctr" marL="73152" marR="73152">
                     <a:lnL w="9525" cap="flat" cmpd="sng" algn="ctr">
                       <a:solidFill>
-                        <a:srgbClr val="F7D4E3"/>
+                        <a:srgbClr val="FAD1E2"/>
                       </a:solidFill>
                       <a:prstDash val="solid"/>
                     </a:lnL>
                     <a:lnR w="9525" cap="flat" cmpd="sng" algn="ctr">
                       <a:solidFill>
-                        <a:srgbClr val="F7D4E3"/>
+                        <a:srgbClr val="FAD1E2"/>
                       </a:solidFill>
                       <a:prstDash val="solid"/>
                     </a:lnR>
                     <a:lnT w="9525" cap="flat" cmpd="sng" algn="ctr">
                       <a:solidFill>
-                        <a:srgbClr val="F7D4E3"/>
+                        <a:srgbClr val="FAD1E2"/>
                       </a:solidFill>
                       <a:prstDash val="solid"/>
                     </a:lnT>
                     <a:lnB w="9525" cap="flat" cmpd="sng" algn="ctr">
                       <a:solidFill>
-                        <a:srgbClr val="F7D4E3"/>
+                        <a:srgbClr val="FAD1E2"/>
                       </a:solidFill>
                       <a:prstDash val="solid"/>
                     </a:lnB>
                     <a:solidFill>
-                      <a:srgbClr val="FCF3F7"/>
+                      <a:srgbClr val="FDEAF2"/>
                     </a:solidFill>
                   </a:tcPr>
                 </a:tc>
@@ -5795,7 +6010,7 @@
                       <a:r>
                         <a:rPr sz="1600" b="0">
                           <a:solidFill>
-                            <a:srgbClr val="2B2B2B"/>
+                            <a:srgbClr val="26231F"/>
                           </a:solidFill>
                         </a:rPr>
                         <a:t/>
@@ -5805,30 +6020,30 @@
                   <a:tcPr anchor="ctr" marL="73152" marR="73152">
                     <a:lnL w="9525" cap="flat" cmpd="sng" algn="ctr">
                       <a:solidFill>
-                        <a:srgbClr val="F7D4E3"/>
+                        <a:srgbClr val="FAD1E2"/>
                       </a:solidFill>
                       <a:prstDash val="solid"/>
                     </a:lnL>
                     <a:lnR w="9525" cap="flat" cmpd="sng" algn="ctr">
                       <a:solidFill>
-                        <a:srgbClr val="F7D4E3"/>
+                        <a:srgbClr val="FAD1E2"/>
                       </a:solidFill>
                       <a:prstDash val="solid"/>
                     </a:lnR>
                     <a:lnT w="9525" cap="flat" cmpd="sng" algn="ctr">
                       <a:solidFill>
-                        <a:srgbClr val="F7D4E3"/>
+                        <a:srgbClr val="FAD1E2"/>
                       </a:solidFill>
                       <a:prstDash val="solid"/>
                     </a:lnT>
                     <a:lnB w="9525" cap="flat" cmpd="sng" algn="ctr">
                       <a:solidFill>
-                        <a:srgbClr val="F7D4E3"/>
+                        <a:srgbClr val="FAD1E2"/>
                       </a:solidFill>
                       <a:prstDash val="solid"/>
                     </a:lnB>
                     <a:solidFill>
-                      <a:srgbClr val="FCF3F7"/>
+                      <a:srgbClr val="FDEAF2"/>
                     </a:solidFill>
                   </a:tcPr>
                 </a:tc>
@@ -5841,7 +6056,7 @@
                       <a:r>
                         <a:rPr sz="1600" b="0">
                           <a:solidFill>
-                            <a:srgbClr val="2B2B2B"/>
+                            <a:srgbClr val="26231F"/>
                           </a:solidFill>
                         </a:rPr>
                         <a:t/>
@@ -5851,30 +6066,30 @@
                   <a:tcPr anchor="ctr" marL="73152" marR="73152">
                     <a:lnL w="9525" cap="flat" cmpd="sng" algn="ctr">
                       <a:solidFill>
-                        <a:srgbClr val="F7D4E3"/>
+                        <a:srgbClr val="FAD1E2"/>
                       </a:solidFill>
                       <a:prstDash val="solid"/>
                     </a:lnL>
                     <a:lnR w="9525" cap="flat" cmpd="sng" algn="ctr">
                       <a:solidFill>
-                        <a:srgbClr val="F7D4E3"/>
+                        <a:srgbClr val="FAD1E2"/>
                       </a:solidFill>
                       <a:prstDash val="solid"/>
                     </a:lnR>
                     <a:lnT w="9525" cap="flat" cmpd="sng" algn="ctr">
                       <a:solidFill>
-                        <a:srgbClr val="F7D4E3"/>
+                        <a:srgbClr val="FAD1E2"/>
                       </a:solidFill>
                       <a:prstDash val="solid"/>
                     </a:lnT>
                     <a:lnB w="9525" cap="flat" cmpd="sng" algn="ctr">
                       <a:solidFill>
-                        <a:srgbClr val="F7D4E3"/>
+                        <a:srgbClr val="FAD1E2"/>
                       </a:solidFill>
                       <a:prstDash val="solid"/>
                     </a:lnB>
                     <a:solidFill>
-                      <a:srgbClr val="FCF3F7"/>
+                      <a:srgbClr val="FDEAF2"/>
                     </a:solidFill>
                   </a:tcPr>
                 </a:tc>
@@ -5887,7 +6102,7 @@
                       <a:r>
                         <a:rPr sz="1600" b="0">
                           <a:solidFill>
-                            <a:srgbClr val="2B2B2B"/>
+                            <a:srgbClr val="26231F"/>
                           </a:solidFill>
                         </a:rPr>
                         <a:t/>
@@ -5897,30 +6112,30 @@
                   <a:tcPr anchor="ctr" marL="73152" marR="73152">
                     <a:lnL w="9525" cap="flat" cmpd="sng" algn="ctr">
                       <a:solidFill>
-                        <a:srgbClr val="F7D4E3"/>
+                        <a:srgbClr val="FAD1E2"/>
                       </a:solidFill>
                       <a:prstDash val="solid"/>
                     </a:lnL>
                     <a:lnR w="9525" cap="flat" cmpd="sng" algn="ctr">
                       <a:solidFill>
-                        <a:srgbClr val="F7D4E3"/>
+                        <a:srgbClr val="FAD1E2"/>
                       </a:solidFill>
                       <a:prstDash val="solid"/>
                     </a:lnR>
                     <a:lnT w="9525" cap="flat" cmpd="sng" algn="ctr">
                       <a:solidFill>
-                        <a:srgbClr val="F7D4E3"/>
+                        <a:srgbClr val="FAD1E2"/>
                       </a:solidFill>
                       <a:prstDash val="solid"/>
                     </a:lnT>
                     <a:lnB w="9525" cap="flat" cmpd="sng" algn="ctr">
                       <a:solidFill>
-                        <a:srgbClr val="F7D4E3"/>
+                        <a:srgbClr val="FAD1E2"/>
                       </a:solidFill>
                       <a:prstDash val="solid"/>
                     </a:lnB>
                     <a:solidFill>
-                      <a:srgbClr val="FCF3F7"/>
+                      <a:srgbClr val="FDEAF2"/>
                     </a:solidFill>
                   </a:tcPr>
                 </a:tc>
@@ -5935,7 +6150,7 @@
                       <a:r>
                         <a:rPr sz="1600" b="1">
                           <a:solidFill>
-                            <a:srgbClr val="6F1F41"/>
+                            <a:srgbClr val="492735"/>
                           </a:solidFill>
                         </a:rPr>
                         <a:t>새로 한 것</a:t>
@@ -5945,30 +6160,30 @@
                   <a:tcPr anchor="ctr" marL="73152" marR="73152">
                     <a:lnL w="9525" cap="flat" cmpd="sng" algn="ctr">
                       <a:solidFill>
-                        <a:srgbClr val="F7D4E3"/>
+                        <a:srgbClr val="FAD1E2"/>
                       </a:solidFill>
                       <a:prstDash val="solid"/>
                     </a:lnL>
                     <a:lnR w="9525" cap="flat" cmpd="sng" algn="ctr">
                       <a:solidFill>
-                        <a:srgbClr val="F7D4E3"/>
+                        <a:srgbClr val="FAD1E2"/>
                       </a:solidFill>
                       <a:prstDash val="solid"/>
                     </a:lnR>
                     <a:lnT w="9525" cap="flat" cmpd="sng" algn="ctr">
                       <a:solidFill>
-                        <a:srgbClr val="F7D4E3"/>
+                        <a:srgbClr val="FAD1E2"/>
                       </a:solidFill>
                       <a:prstDash val="solid"/>
                     </a:lnT>
                     <a:lnB w="9525" cap="flat" cmpd="sng" algn="ctr">
                       <a:solidFill>
-                        <a:srgbClr val="F7D4E3"/>
+                        <a:srgbClr val="FAD1E2"/>
                       </a:solidFill>
                       <a:prstDash val="solid"/>
                     </a:lnB>
                     <a:solidFill>
-                      <a:srgbClr val="F7D4E3"/>
+                      <a:srgbClr val="FAD1E2"/>
                     </a:solidFill>
                   </a:tcPr>
                 </a:tc>
@@ -5981,7 +6196,7 @@
                       <a:r>
                         <a:rPr sz="1600" b="0">
                           <a:solidFill>
-                            <a:srgbClr val="2B2B2B"/>
+                            <a:srgbClr val="26231F"/>
                           </a:solidFill>
                         </a:rPr>
                         <a:t/>
@@ -5991,25 +6206,25 @@
                   <a:tcPr anchor="ctr" marL="73152" marR="73152">
                     <a:lnL w="9525" cap="flat" cmpd="sng" algn="ctr">
                       <a:solidFill>
-                        <a:srgbClr val="F7D4E3"/>
+                        <a:srgbClr val="FAD1E2"/>
                       </a:solidFill>
                       <a:prstDash val="solid"/>
                     </a:lnL>
                     <a:lnR w="9525" cap="flat" cmpd="sng" algn="ctr">
                       <a:solidFill>
-                        <a:srgbClr val="F7D4E3"/>
+                        <a:srgbClr val="FAD1E2"/>
                       </a:solidFill>
                       <a:prstDash val="solid"/>
                     </a:lnR>
                     <a:lnT w="9525" cap="flat" cmpd="sng" algn="ctr">
                       <a:solidFill>
-                        <a:srgbClr val="F7D4E3"/>
+                        <a:srgbClr val="FAD1E2"/>
                       </a:solidFill>
                       <a:prstDash val="solid"/>
                     </a:lnT>
                     <a:lnB w="9525" cap="flat" cmpd="sng" algn="ctr">
                       <a:solidFill>
-                        <a:srgbClr val="F7D4E3"/>
+                        <a:srgbClr val="FAD1E2"/>
                       </a:solidFill>
                       <a:prstDash val="solid"/>
                     </a:lnB>
@@ -6027,7 +6242,7 @@
                       <a:r>
                         <a:rPr sz="1600" b="0">
                           <a:solidFill>
-                            <a:srgbClr val="2B2B2B"/>
+                            <a:srgbClr val="26231F"/>
                           </a:solidFill>
                         </a:rPr>
                         <a:t/>
@@ -6037,25 +6252,25 @@
                   <a:tcPr anchor="ctr" marL="73152" marR="73152">
                     <a:lnL w="9525" cap="flat" cmpd="sng" algn="ctr">
                       <a:solidFill>
-                        <a:srgbClr val="F7D4E3"/>
+                        <a:srgbClr val="FAD1E2"/>
                       </a:solidFill>
                       <a:prstDash val="solid"/>
                     </a:lnL>
                     <a:lnR w="9525" cap="flat" cmpd="sng" algn="ctr">
                       <a:solidFill>
-                        <a:srgbClr val="F7D4E3"/>
+                        <a:srgbClr val="FAD1E2"/>
                       </a:solidFill>
                       <a:prstDash val="solid"/>
                     </a:lnR>
                     <a:lnT w="9525" cap="flat" cmpd="sng" algn="ctr">
                       <a:solidFill>
-                        <a:srgbClr val="F7D4E3"/>
+                        <a:srgbClr val="FAD1E2"/>
                       </a:solidFill>
                       <a:prstDash val="solid"/>
                     </a:lnT>
                     <a:lnB w="9525" cap="flat" cmpd="sng" algn="ctr">
                       <a:solidFill>
-                        <a:srgbClr val="F7D4E3"/>
+                        <a:srgbClr val="FAD1E2"/>
                       </a:solidFill>
                       <a:prstDash val="solid"/>
                     </a:lnB>
@@ -6073,7 +6288,7 @@
                       <a:r>
                         <a:rPr sz="1600" b="0">
                           <a:solidFill>
-                            <a:srgbClr val="2B2B2B"/>
+                            <a:srgbClr val="26231F"/>
                           </a:solidFill>
                         </a:rPr>
                         <a:t/>
@@ -6083,25 +6298,25 @@
                   <a:tcPr anchor="ctr" marL="73152" marR="73152">
                     <a:lnL w="9525" cap="flat" cmpd="sng" algn="ctr">
                       <a:solidFill>
-                        <a:srgbClr val="F7D4E3"/>
+                        <a:srgbClr val="FAD1E2"/>
                       </a:solidFill>
                       <a:prstDash val="solid"/>
                     </a:lnL>
                     <a:lnR w="9525" cap="flat" cmpd="sng" algn="ctr">
                       <a:solidFill>
-                        <a:srgbClr val="F7D4E3"/>
+                        <a:srgbClr val="FAD1E2"/>
                       </a:solidFill>
                       <a:prstDash val="solid"/>
                     </a:lnR>
                     <a:lnT w="9525" cap="flat" cmpd="sng" algn="ctr">
                       <a:solidFill>
-                        <a:srgbClr val="F7D4E3"/>
+                        <a:srgbClr val="FAD1E2"/>
                       </a:solidFill>
                       <a:prstDash val="solid"/>
                     </a:lnT>
                     <a:lnB w="9525" cap="flat" cmpd="sng" algn="ctr">
                       <a:solidFill>
-                        <a:srgbClr val="F7D4E3"/>
+                        <a:srgbClr val="FAD1E2"/>
                       </a:solidFill>
                       <a:prstDash val="solid"/>
                     </a:lnB>
@@ -6119,7 +6334,7 @@
                       <a:r>
                         <a:rPr sz="1600" b="0">
                           <a:solidFill>
-                            <a:srgbClr val="2B2B2B"/>
+                            <a:srgbClr val="26231F"/>
                           </a:solidFill>
                         </a:rPr>
                         <a:t/>
@@ -6129,25 +6344,25 @@
                   <a:tcPr anchor="ctr" marL="73152" marR="73152">
                     <a:lnL w="9525" cap="flat" cmpd="sng" algn="ctr">
                       <a:solidFill>
-                        <a:srgbClr val="F7D4E3"/>
+                        <a:srgbClr val="FAD1E2"/>
                       </a:solidFill>
                       <a:prstDash val="solid"/>
                     </a:lnL>
                     <a:lnR w="9525" cap="flat" cmpd="sng" algn="ctr">
                       <a:solidFill>
-                        <a:srgbClr val="F7D4E3"/>
+                        <a:srgbClr val="FAD1E2"/>
                       </a:solidFill>
                       <a:prstDash val="solid"/>
                     </a:lnR>
                     <a:lnT w="9525" cap="flat" cmpd="sng" algn="ctr">
                       <a:solidFill>
-                        <a:srgbClr val="F7D4E3"/>
+                        <a:srgbClr val="FAD1E2"/>
                       </a:solidFill>
                       <a:prstDash val="solid"/>
                     </a:lnT>
                     <a:lnB w="9525" cap="flat" cmpd="sng" algn="ctr">
                       <a:solidFill>
-                        <a:srgbClr val="F7D4E3"/>
+                        <a:srgbClr val="FAD1E2"/>
                       </a:solidFill>
                       <a:prstDash val="solid"/>
                     </a:lnB>
@@ -6175,7 +6390,7 @@
     <p:bg>
       <p:bgPr>
         <a:solidFill>
-          <a:srgbClr val="FCF3F7"/>
+          <a:srgbClr val="FDFAFB"/>
         </a:solidFill>
         <a:effectLst/>
       </p:bgPr>
@@ -6195,14 +6410,16 @@
         </p:nvSpPr>
         <p:spPr>
           <a:xfrm>
-            <a:off x="0" y="0"/>
-            <a:ext cx="12191695" cy="274320"/>
-          </a:xfrm>
-          <a:prstGeom prst="rect">
-            <a:avLst/>
+            <a:off x="640080" y="566928"/>
+            <a:ext cx="64008" cy="868680"/>
+          </a:xfrm>
+          <a:prstGeom prst="roundRect">
+            <a:avLst>
+              <a:gd name="adj" fmla="val 50000"/>
+            </a:avLst>
           </a:prstGeom>
           <a:solidFill>
-            <a:srgbClr val="CD4C82"/>
+            <a:srgbClr val="ED97BB"/>
           </a:solidFill>
           <a:ln>
             <a:noFill/>
@@ -6218,20 +6435,58 @@
       </p:sp>
       <p:sp>
         <p:nvSpPr>
-          <p:cNvPr id="4" name="장식"/>
-          <p:cNvSpPr/>
+          <p:cNvPr id="4" name="상단 라벨"/>
+          <p:cNvSpPr txBox="1"/>
           <p:nvPr/>
         </p:nvSpPr>
         <p:spPr>
           <a:xfrm>
-            <a:off x="0" y="274320"/>
-            <a:ext cx="12191695" cy="54864"/>
+            <a:off x="868680" y="274320"/>
+            <a:ext cx="5486400" cy="274320"/>
           </a:xfrm>
           <a:prstGeom prst="rect">
             <a:avLst/>
           </a:prstGeom>
+          <a:noFill/>
+        </p:spPr>
+        <p:txBody>
+          <a:bodyPr wrap="square" lIns="54864" rIns="54864" tIns="27432" bIns="27432" anchor="ctr">
+            <a:noAutofit/>
+          </a:bodyPr>
+          <a:lstStyle/>
+          <a:p>
+            <a:pPr algn="l">
+              <a:lnSpc>
+                <a:spcPct val="115000"/>
+              </a:lnSpc>
+            </a:pPr>
+            <a:r>
+              <a:rPr sz="900" b="1" i="0" spc="250">
+                <a:solidFill>
+                  <a:srgbClr val="8E8780"/>
+                </a:solidFill>
+              </a:rPr>
+              <a:t>FIRST BIRTHDAY</a:t>
+            </a:r>
+          </a:p>
+        </p:txBody>
+      </p:sp>
+      <p:sp>
+        <p:nvSpPr>
+          <p:cNvPr id="5" name="포인트"/>
+          <p:cNvSpPr/>
+          <p:nvPr/>
+        </p:nvSpPr>
+        <p:spPr>
+          <a:xfrm>
+            <a:off x="11167567" y="667512"/>
+            <a:ext cx="310896" cy="310896"/>
+          </a:xfrm>
+          <a:prstGeom prst="mathPlus">
+            <a:avLst/>
+          </a:prstGeom>
           <a:solidFill>
-            <a:srgbClr val="339941"/>
+            <a:srgbClr val="F2A6C6"/>
           </a:solidFill>
           <a:ln>
             <a:noFill/>
@@ -6257,8 +6512,8 @@
         </p:nvSpPr>
         <p:spPr>
           <a:xfrm>
-            <a:off x="640080" y="457200"/>
-            <a:ext cx="9722815" cy="868680"/>
+            <a:off x="868680" y="566928"/>
+            <a:ext cx="9448495" cy="868680"/>
           </a:xfrm>
         </p:spPr>
         <p:txBody>
@@ -6275,7 +6530,7 @@
             <a:r>
               <a:rPr sz="3000" b="1" i="0">
                 <a:solidFill>
-                  <a:srgbClr val="6F1F41"/>
+                  <a:srgbClr val="26231F"/>
                 </a:solidFill>
               </a:rPr>
               <a:t>사진 모음</a:t>
@@ -6285,14 +6540,14 @@
       </p:sp>
       <p:sp>
         <p:nvSpPr>
-          <p:cNvPr id="5" name="사진 자리"/>
+          <p:cNvPr id="6" name="사진 자리"/>
           <p:cNvSpPr/>
           <p:nvPr/>
         </p:nvSpPr>
         <p:spPr>
           <a:xfrm>
-            <a:off x="640080" y="1600200"/>
-            <a:ext cx="2590723" cy="2308860"/>
+            <a:off x="640080" y="1783080"/>
+            <a:ext cx="2590723" cy="2194560"/>
           </a:xfrm>
           <a:prstGeom prst="roundRect">
             <a:avLst>
@@ -6300,12 +6555,10 @@
             </a:avLst>
           </a:prstGeom>
           <a:solidFill>
-            <a:srgbClr val="F7D4E3"/>
+            <a:srgbClr val="FAD1E2"/>
           </a:solidFill>
           <a:ln w="19050">
-            <a:solidFill>
-              <a:srgbClr val="CD4C82"/>
-            </a:solidFill>
+            <a:noFill/>
             <a:prstDash val="dash"/>
           </a:ln>
         </p:spPr>
@@ -6323,7 +6576,7 @@
             <a:r>
               <a:rPr sz="1200" b="0" i="0">
                 <a:solidFill>
-                  <a:srgbClr val="6F1F41"/>
+                  <a:srgbClr val="8E8780"/>
                 </a:solidFill>
               </a:rPr>
               <a:t>사진 1</a:t>
@@ -6333,14 +6586,14 @@
       </p:sp>
       <p:sp>
         <p:nvSpPr>
-          <p:cNvPr id="6" name="사진 자리"/>
+          <p:cNvPr id="7" name="사진 자리"/>
           <p:cNvSpPr/>
           <p:nvPr/>
         </p:nvSpPr>
         <p:spPr>
           <a:xfrm>
-            <a:off x="3413683" y="1600200"/>
-            <a:ext cx="2590723" cy="2308860"/>
+            <a:off x="3413683" y="1783080"/>
+            <a:ext cx="2590723" cy="2194560"/>
           </a:xfrm>
           <a:prstGeom prst="roundRect">
             <a:avLst>
@@ -6348,12 +6601,10 @@
             </a:avLst>
           </a:prstGeom>
           <a:solidFill>
-            <a:srgbClr val="F7D4E3"/>
+            <a:srgbClr val="FAD1E2"/>
           </a:solidFill>
           <a:ln w="19050">
-            <a:solidFill>
-              <a:srgbClr val="CD4C82"/>
-            </a:solidFill>
+            <a:noFill/>
             <a:prstDash val="dash"/>
           </a:ln>
         </p:spPr>
@@ -6371,7 +6622,7 @@
             <a:r>
               <a:rPr sz="1200" b="0" i="0">
                 <a:solidFill>
-                  <a:srgbClr val="6F1F41"/>
+                  <a:srgbClr val="8E8780"/>
                 </a:solidFill>
               </a:rPr>
               <a:t>사진 2</a:t>
@@ -6381,14 +6632,14 @@
       </p:sp>
       <p:sp>
         <p:nvSpPr>
-          <p:cNvPr id="7" name="사진 자리"/>
+          <p:cNvPr id="8" name="사진 자리"/>
           <p:cNvSpPr/>
           <p:nvPr/>
         </p:nvSpPr>
         <p:spPr>
           <a:xfrm>
-            <a:off x="6187287" y="1600200"/>
-            <a:ext cx="2590723" cy="2308860"/>
+            <a:off x="6187287" y="1783080"/>
+            <a:ext cx="2590723" cy="2194560"/>
           </a:xfrm>
           <a:prstGeom prst="roundRect">
             <a:avLst>
@@ -6396,12 +6647,10 @@
             </a:avLst>
           </a:prstGeom>
           <a:solidFill>
-            <a:srgbClr val="F7D4E3"/>
+            <a:srgbClr val="FAD1E2"/>
           </a:solidFill>
           <a:ln w="19050">
-            <a:solidFill>
-              <a:srgbClr val="CD4C82"/>
-            </a:solidFill>
+            <a:noFill/>
             <a:prstDash val="dash"/>
           </a:ln>
         </p:spPr>
@@ -6419,7 +6668,7 @@
             <a:r>
               <a:rPr sz="1200" b="0" i="0">
                 <a:solidFill>
-                  <a:srgbClr val="6F1F41"/>
+                  <a:srgbClr val="8E8780"/>
                 </a:solidFill>
               </a:rPr>
               <a:t>사진 3</a:t>
@@ -6429,14 +6678,14 @@
       </p:sp>
       <p:sp>
         <p:nvSpPr>
-          <p:cNvPr id="8" name="사진 자리"/>
+          <p:cNvPr id="9" name="사진 자리"/>
           <p:cNvSpPr/>
           <p:nvPr/>
         </p:nvSpPr>
         <p:spPr>
           <a:xfrm>
-            <a:off x="8960891" y="1600200"/>
-            <a:ext cx="2590723" cy="2308860"/>
+            <a:off x="8960891" y="1783080"/>
+            <a:ext cx="2590723" cy="2194560"/>
           </a:xfrm>
           <a:prstGeom prst="roundRect">
             <a:avLst>
@@ -6444,12 +6693,10 @@
             </a:avLst>
           </a:prstGeom>
           <a:solidFill>
-            <a:srgbClr val="F7D4E3"/>
+            <a:srgbClr val="FAD1E2"/>
           </a:solidFill>
           <a:ln w="19050">
-            <a:solidFill>
-              <a:srgbClr val="CD4C82"/>
-            </a:solidFill>
+            <a:noFill/>
             <a:prstDash val="dash"/>
           </a:ln>
         </p:spPr>
@@ -6467,7 +6714,7 @@
             <a:r>
               <a:rPr sz="1200" b="0" i="0">
                 <a:solidFill>
-                  <a:srgbClr val="6F1F41"/>
+                  <a:srgbClr val="8E8780"/>
                 </a:solidFill>
               </a:rPr>
               <a:t>사진 4</a:t>
@@ -6477,14 +6724,14 @@
       </p:sp>
       <p:sp>
         <p:nvSpPr>
-          <p:cNvPr id="9" name="사진 자리"/>
+          <p:cNvPr id="10" name="사진 자리"/>
           <p:cNvSpPr/>
           <p:nvPr/>
         </p:nvSpPr>
         <p:spPr>
           <a:xfrm>
-            <a:off x="640080" y="4091939"/>
-            <a:ext cx="2590723" cy="2308860"/>
+            <a:off x="640080" y="4160520"/>
+            <a:ext cx="2590723" cy="2194560"/>
           </a:xfrm>
           <a:prstGeom prst="roundRect">
             <a:avLst>
@@ -6492,12 +6739,10 @@
             </a:avLst>
           </a:prstGeom>
           <a:solidFill>
-            <a:srgbClr val="F7D4E3"/>
+            <a:srgbClr val="FAD1E2"/>
           </a:solidFill>
           <a:ln w="19050">
-            <a:solidFill>
-              <a:srgbClr val="CD4C82"/>
-            </a:solidFill>
+            <a:noFill/>
             <a:prstDash val="dash"/>
           </a:ln>
         </p:spPr>
@@ -6515,7 +6760,7 @@
             <a:r>
               <a:rPr sz="1200" b="0" i="0">
                 <a:solidFill>
-                  <a:srgbClr val="6F1F41"/>
+                  <a:srgbClr val="8E8780"/>
                 </a:solidFill>
               </a:rPr>
               <a:t>사진 5</a:t>
@@ -6525,14 +6770,14 @@
       </p:sp>
       <p:sp>
         <p:nvSpPr>
-          <p:cNvPr id="10" name="사진 자리"/>
+          <p:cNvPr id="11" name="사진 자리"/>
           <p:cNvSpPr/>
           <p:nvPr/>
         </p:nvSpPr>
         <p:spPr>
           <a:xfrm>
-            <a:off x="3413683" y="4091939"/>
-            <a:ext cx="2590723" cy="2308860"/>
+            <a:off x="3413683" y="4160520"/>
+            <a:ext cx="2590723" cy="2194560"/>
           </a:xfrm>
           <a:prstGeom prst="roundRect">
             <a:avLst>
@@ -6540,12 +6785,10 @@
             </a:avLst>
           </a:prstGeom>
           <a:solidFill>
-            <a:srgbClr val="F7D4E3"/>
+            <a:srgbClr val="FAD1E2"/>
           </a:solidFill>
           <a:ln w="19050">
-            <a:solidFill>
-              <a:srgbClr val="CD4C82"/>
-            </a:solidFill>
+            <a:noFill/>
             <a:prstDash val="dash"/>
           </a:ln>
         </p:spPr>
@@ -6563,7 +6806,7 @@
             <a:r>
               <a:rPr sz="1200" b="0" i="0">
                 <a:solidFill>
-                  <a:srgbClr val="6F1F41"/>
+                  <a:srgbClr val="8E8780"/>
                 </a:solidFill>
               </a:rPr>
               <a:t>사진 6</a:t>
@@ -6573,14 +6816,14 @@
       </p:sp>
       <p:sp>
         <p:nvSpPr>
-          <p:cNvPr id="11" name="사진 자리"/>
+          <p:cNvPr id="12" name="사진 자리"/>
           <p:cNvSpPr/>
           <p:nvPr/>
         </p:nvSpPr>
         <p:spPr>
           <a:xfrm>
-            <a:off x="6187287" y="4091939"/>
-            <a:ext cx="2590723" cy="2308860"/>
+            <a:off x="6187287" y="4160520"/>
+            <a:ext cx="2590723" cy="2194560"/>
           </a:xfrm>
           <a:prstGeom prst="roundRect">
             <a:avLst>
@@ -6588,12 +6831,10 @@
             </a:avLst>
           </a:prstGeom>
           <a:solidFill>
-            <a:srgbClr val="F7D4E3"/>
+            <a:srgbClr val="FAD1E2"/>
           </a:solidFill>
           <a:ln w="19050">
-            <a:solidFill>
-              <a:srgbClr val="CD4C82"/>
-            </a:solidFill>
+            <a:noFill/>
             <a:prstDash val="dash"/>
           </a:ln>
         </p:spPr>
@@ -6611,7 +6852,7 @@
             <a:r>
               <a:rPr sz="1200" b="0" i="0">
                 <a:solidFill>
-                  <a:srgbClr val="6F1F41"/>
+                  <a:srgbClr val="8E8780"/>
                 </a:solidFill>
               </a:rPr>
               <a:t>사진 7</a:t>
@@ -6621,14 +6862,14 @@
       </p:sp>
       <p:sp>
         <p:nvSpPr>
-          <p:cNvPr id="12" name="사진 자리"/>
+          <p:cNvPr id="13" name="사진 자리"/>
           <p:cNvSpPr/>
           <p:nvPr/>
         </p:nvSpPr>
         <p:spPr>
           <a:xfrm>
-            <a:off x="8960891" y="4091939"/>
-            <a:ext cx="2590723" cy="2308860"/>
+            <a:off x="8960891" y="4160520"/>
+            <a:ext cx="2590723" cy="2194560"/>
           </a:xfrm>
           <a:prstGeom prst="roundRect">
             <a:avLst>
@@ -6636,12 +6877,10 @@
             </a:avLst>
           </a:prstGeom>
           <a:solidFill>
-            <a:srgbClr val="F7D4E3"/>
+            <a:srgbClr val="FAD1E2"/>
           </a:solidFill>
           <a:ln w="19050">
-            <a:solidFill>
-              <a:srgbClr val="CD4C82"/>
-            </a:solidFill>
+            <a:noFill/>
             <a:prstDash val="dash"/>
           </a:ln>
         </p:spPr>
@@ -6659,7 +6898,7 @@
             <a:r>
               <a:rPr sz="1200" b="0" i="0">
                 <a:solidFill>
-                  <a:srgbClr val="6F1F41"/>
+                  <a:srgbClr val="8E8780"/>
                 </a:solidFill>
               </a:rPr>
               <a:t>사진 8</a:t>
@@ -6678,6 +6917,14 @@
 <file path=ppt/slides/slide6.xml><?xml version="1.0" encoding="utf-8"?>
 <p:sld xmlns:a="http://schemas.openxmlformats.org/drawingml/2006/main" xmlns:p="http://schemas.openxmlformats.org/presentationml/2006/main" xmlns:r="http://schemas.openxmlformats.org/officeDocument/2006/relationships">
   <p:cSld>
+    <p:bg>
+      <p:bgPr>
+        <a:solidFill>
+          <a:srgbClr val="FDEAF2"/>
+        </a:solidFill>
+        <a:effectLst/>
+      </p:bgPr>
+    </p:bg>
     <p:spTree>
       <p:nvGrpSpPr>
         <p:cNvPr id="1" name=""/>
@@ -6685,30 +6932,119 @@
         <p:nvPr/>
       </p:nvGrpSpPr>
       <p:grpSpPr/>
-      <p:pic>
-        <p:nvPicPr>
-          <p:cNvPr id="3" name="표지 그림" descr="birthday-01.jpg"/>
-          <p:cNvPicPr>
-            <a:picLocks noChangeAspect="1"/>
-          </p:cNvPicPr>
+      <p:sp>
+        <p:nvSpPr>
+          <p:cNvPr id="3" name="사진 자리"/>
+          <p:cNvSpPr/>
           <p:nvPr/>
-        </p:nvPicPr>
-        <p:blipFill>
-          <a:blip r:embed="rId2"/>
-          <a:stretch>
-            <a:fillRect/>
-          </a:stretch>
-        </p:blipFill>
-        <p:spPr>
-          <a:xfrm>
-            <a:off x="0" y="0"/>
-            <a:ext cx="12191695" cy="6858000"/>
+        </p:nvSpPr>
+        <p:spPr>
+          <a:xfrm>
+            <a:off x="7558851" y="685800"/>
+            <a:ext cx="3169840" cy="5486400"/>
+          </a:xfrm>
+          <a:prstGeom prst="round2SameRect">
+            <a:avLst>
+              <a:gd name="adj1" fmla="val 50000"/>
+              <a:gd name="adj2" fmla="val 0"/>
+            </a:avLst>
+          </a:prstGeom>
+          <a:solidFill>
+            <a:srgbClr val="F2A6C6"/>
+          </a:solidFill>
+          <a:ln>
+            <a:noFill/>
+          </a:ln>
+        </p:spPr>
+        <p:txBody>
+          <a:bodyPr rtlCol="0" anchor="ctr" wrap="square" lIns="54864" rIns="54864" tIns="27432" bIns="27432">
+            <a:noAutofit/>
+          </a:bodyPr>
+          <a:lstStyle/>
+          <a:p>
+            <a:pPr algn="ctr">
+              <a:lnSpc>
+                <a:spcPct val="100000"/>
+              </a:lnSpc>
+            </a:pPr>
+            <a:r>
+              <a:rPr sz="1400" b="0" i="0">
+                <a:solidFill>
+                  <a:srgbClr val="492735"/>
+                </a:solidFill>
+              </a:rPr>
+              <a:t>사진을 넣어 주세요</a:t>
+            </a:r>
+          </a:p>
+        </p:txBody>
+      </p:sp>
+      <p:sp>
+        <p:nvSpPr>
+          <p:cNvPr id="4" name="장식"/>
+          <p:cNvSpPr/>
+          <p:nvPr/>
+        </p:nvSpPr>
+        <p:spPr>
+          <a:xfrm>
+            <a:off x="6827349" y="4251960"/>
+            <a:ext cx="1005840" cy="1005840"/>
+          </a:xfrm>
+          <a:prstGeom prst="ellipse">
+            <a:avLst/>
+          </a:prstGeom>
+          <a:solidFill>
+            <a:srgbClr val="F2A6C6"/>
+          </a:solidFill>
+          <a:ln>
+            <a:noFill/>
+          </a:ln>
+        </p:spPr>
+        <p:txBody>
+          <a:bodyPr rtlCol="0" anchor="ctr"/>
+          <a:lstStyle/>
+          <a:p>
+            <a:pPr algn="ctr"/>
+          </a:p>
+        </p:txBody>
+      </p:sp>
+      <p:sp>
+        <p:nvSpPr>
+          <p:cNvPr id="5" name="라벨"/>
+          <p:cNvSpPr txBox="1"/>
+          <p:nvPr/>
+        </p:nvSpPr>
+        <p:spPr>
+          <a:xfrm>
+            <a:off x="822960" y="2148840"/>
+            <a:ext cx="5608179" cy="274320"/>
           </a:xfrm>
           <a:prstGeom prst="rect">
             <a:avLst/>
           </a:prstGeom>
-        </p:spPr>
-      </p:pic>
+          <a:noFill/>
+        </p:spPr>
+        <p:txBody>
+          <a:bodyPr wrap="square" lIns="54864" rIns="54864" tIns="27432" bIns="27432" anchor="t">
+            <a:noAutofit/>
+          </a:bodyPr>
+          <a:lstStyle/>
+          <a:p>
+            <a:pPr algn="l">
+              <a:lnSpc>
+                <a:spcPct val="115000"/>
+              </a:lnSpc>
+            </a:pPr>
+            <a:r>
+              <a:rPr sz="1000" b="1" i="0" spc="250">
+                <a:solidFill>
+                  <a:srgbClr val="26231F"/>
+                </a:solidFill>
+              </a:rPr>
+              <a:t>FIRST BIRTHDAY</a:t>
+            </a:r>
+          </a:p>
+        </p:txBody>
+      </p:sp>
       <p:sp>
         <p:nvSpPr>
           <p:cNvPr id="2" name="Title 1"/>
@@ -6721,8 +7057,8 @@
         </p:nvSpPr>
         <p:spPr>
           <a:xfrm>
-            <a:off x="853418" y="2057400"/>
-            <a:ext cx="6095847" cy="1554480"/>
+            <a:off x="822960" y="2606040"/>
+            <a:ext cx="5608179" cy="1188720"/>
           </a:xfrm>
         </p:spPr>
         <p:txBody>
@@ -6739,7 +7075,7 @@
             <a:r>
               <a:rPr sz="3400" b="1" i="0">
                 <a:solidFill>
-                  <a:srgbClr val="6F1F41"/>
+                  <a:srgbClr val="26231F"/>
                 </a:solidFill>
               </a:rPr>
               <a:t>와 주셔서 고맙습니다</a:t>
@@ -6749,14 +7085,14 @@
       </p:sp>
       <p:sp>
         <p:nvSpPr>
-          <p:cNvPr id="4" name="한 줄 문구"/>
+          <p:cNvPr id="6" name="한 줄 문구"/>
           <p:cNvSpPr txBox="1"/>
           <p:nvPr/>
         </p:nvSpPr>
         <p:spPr>
           <a:xfrm>
-            <a:off x="853418" y="3749039"/>
-            <a:ext cx="6095847" cy="822960"/>
+            <a:off x="822960" y="3886200"/>
+            <a:ext cx="5608179" cy="822960"/>
           </a:xfrm>
           <a:prstGeom prst="rect">
             <a:avLst/>
@@ -6775,9 +7111,9 @@
               </a:lnSpc>
             </a:pPr>
             <a:r>
-              <a:rPr sz="1700" b="0" i="1">
+              <a:rPr sz="1700" b="0" i="0">
                 <a:solidFill>
-                  <a:srgbClr val="6F1F41"/>
+                  <a:srgbClr val="26231F"/>
                 </a:solidFill>
               </a:rPr>
               <a:t>아이가 한 살이 되었습니다</a:t>
@@ -6787,14 +7123,14 @@
       </p:sp>
       <p:sp>
         <p:nvSpPr>
-          <p:cNvPr id="5" name="안내 문구"/>
+          <p:cNvPr id="7" name="안내 문구"/>
           <p:cNvSpPr txBox="1"/>
           <p:nvPr/>
         </p:nvSpPr>
         <p:spPr>
           <a:xfrm>
-            <a:off x="853418" y="4617720"/>
-            <a:ext cx="6095847" cy="914400"/>
+            <a:off x="822960" y="4754880"/>
+            <a:ext cx="5608179" cy="914400"/>
           </a:xfrm>
           <a:prstGeom prst="rect">
             <a:avLst/>
@@ -6815,7 +7151,7 @@
             <a:r>
               <a:rPr sz="1400" b="0" i="0">
                 <a:solidFill>
-                  <a:srgbClr val="666666"/>
+                  <a:srgbClr val="26231F"/>
                 </a:solidFill>
               </a:rPr>
               <a:t>아기 이름 · 부모 이름</a:t>
@@ -6842,34 +7178,34 @@
         <a:sysClr val="window" lastClr="FFFFFF"/>
       </a:lt1>
       <a:dk2>
-        <a:srgbClr val="6F1F41"/>
+        <a:srgbClr val="492735"/>
       </a:dk2>
       <a:lt2>
-        <a:srgbClr val="FCF3F7"/>
+        <a:srgbClr val="FDEAF2"/>
       </a:lt2>
       <a:accent1>
-        <a:srgbClr val="CD4C82"/>
+        <a:srgbClr val="ED97BB"/>
       </a:accent1>
       <a:accent2>
-        <a:srgbClr val="339941"/>
+        <a:srgbClr val="F3BCBA"/>
       </a:accent2>
       <a:accent3>
-        <a:srgbClr val="6F1F41"/>
+        <a:srgbClr val="492735"/>
       </a:accent3>
       <a:accent4>
-        <a:srgbClr val="F7D4E3"/>
+        <a:srgbClr val="FAD1E2"/>
       </a:accent4>
       <a:accent5>
-        <a:srgbClr val="807262"/>
+        <a:srgbClr val="F0AABA"/>
       </a:accent5>
       <a:accent6>
-        <a:srgbClr val="A9798D"/>
+        <a:srgbClr val="927D86"/>
       </a:accent6>
       <a:hlink>
-        <a:srgbClr val="CD4C82"/>
+        <a:srgbClr val="ED97BB"/>
       </a:hlink>
       <a:folHlink>
-        <a:srgbClr val="6F1F41"/>
+        <a:srgbClr val="492735"/>
       </a:folHlink>
     </a:clrScheme>
     <a:fontScheme name="Office">
